--- a/Samyak_MT25039_K8s_Networking_Presentation.pptx
+++ b/Samyak_MT25039_K8s_Networking_Presentation.pptx
@@ -4001,7 +4001,7 @@
     <p:bg>
       <p:bgPr>
         <a:solidFill>
-          <a:srgbClr val="0D1B2A"/>
+          <a:srgbClr val="FFFFFF"/>
         </a:solidFill>
         <a:effectLst/>
       </p:bgPr>
@@ -4021,14 +4021,14 @@
         </p:nvSpPr>
         <p:spPr>
           <a:xfrm>
-            <a:off x="0" y="0"/>
-            <a:ext cx="12188952" cy="73152"/>
+            <a:off x="0" y="548640"/>
+            <a:ext cx="12188952" cy="10972"/>
           </a:xfrm>
           <a:prstGeom prst="rect">
             <a:avLst/>
           </a:prstGeom>
           <a:solidFill>
-            <a:srgbClr val="4FC3F7"/>
+            <a:srgbClr val="BBBBBB"/>
           </a:solidFill>
           <a:ln>
             <a:noFill/>
@@ -4058,20 +4058,167 @@
       </p:sp>
       <p:sp>
         <p:nvSpPr>
-          <p:cNvPr id="3" name="Rectangle 2"/>
+          <p:cNvPr id="3" name="TextBox 2"/>
+          <p:cNvSpPr txBox="1"/>
+          <p:nvPr/>
+        </p:nvSpPr>
+        <p:spPr>
+          <a:xfrm>
+            <a:off x="164592" y="54864"/>
+            <a:ext cx="4389120" cy="493776"/>
+          </a:xfrm>
+          <a:prstGeom prst="rect">
+            <a:avLst/>
+          </a:prstGeom>
+          <a:noFill/>
+        </p:spPr>
+        <p:txBody>
+          <a:bodyPr wrap="none">
+            <a:spAutoFit/>
+          </a:bodyPr>
+          <a:lstStyle/>
+          <a:p>
+            <a:pPr algn="l"/>
+            <a:r>
+              <a:rPr sz="1700" b="1">
+                <a:solidFill>
+                  <a:srgbClr val="107C6E"/>
+                </a:solidFill>
+                <a:latin typeface="Calibri"/>
+              </a:rPr>
+              <a:t>IIID</a:t>
+            </a:r>
+            <a:r>
+              <a:rPr sz="750">
+                <a:solidFill>
+                  <a:srgbClr val="505050"/>
+                </a:solidFill>
+                <a:latin typeface="Calibri"/>
+              </a:rPr>
+              <a:t>   INDRAPRASTHA INSTITUTE of</a:t>
+            </a:r>
+          </a:p>
+          <a:p>
+            <a:pPr algn="l">
+              <a:spcBef>
+                <a:spcPts val="0"/>
+              </a:spcBef>
+            </a:pPr>
+            <a:r>
+              <a:rPr sz="750">
+                <a:solidFill>
+                  <a:srgbClr val="505050"/>
+                </a:solidFill>
+                <a:latin typeface="Calibri"/>
+              </a:rPr>
+              <a:t>           INFORMATION TECHNOLOGY </a:t>
+            </a:r>
+            <a:r>
+              <a:rPr sz="750" b="1">
+                <a:solidFill>
+                  <a:srgbClr val="107C6E"/>
+                </a:solidFill>
+                <a:latin typeface="Calibri"/>
+              </a:rPr>
+              <a:t>DELHI</a:t>
+            </a:r>
+          </a:p>
+        </p:txBody>
+      </p:sp>
+      <p:sp>
+        <p:nvSpPr>
+          <p:cNvPr id="4" name="TextBox 3"/>
+          <p:cNvSpPr txBox="1"/>
+          <p:nvPr/>
+        </p:nvSpPr>
+        <p:spPr>
+          <a:xfrm>
+            <a:off x="8412480" y="54864"/>
+            <a:ext cx="3657600" cy="493776"/>
+          </a:xfrm>
+          <a:prstGeom prst="rect">
+            <a:avLst/>
+          </a:prstGeom>
+          <a:noFill/>
+        </p:spPr>
+        <p:txBody>
+          <a:bodyPr wrap="none">
+            <a:spAutoFit/>
+          </a:bodyPr>
+          <a:lstStyle/>
+          <a:p>
+            <a:pPr algn="r"/>
+            <a:r>
+              <a:rPr sz="900" b="1">
+                <a:solidFill>
+                  <a:srgbClr val="1A1A1A"/>
+                </a:solidFill>
+                <a:latin typeface="Calibri"/>
+              </a:rPr>
+              <a:t>ECE  |  </a:t>
+            </a:r>
+            <a:r>
+              <a:rPr sz="750">
+                <a:solidFill>
+                  <a:srgbClr val="505050"/>
+                </a:solidFill>
+                <a:latin typeface="Calibri"/>
+              </a:rPr>
+              <a:t>DEPARTMENT OF ELECTRONICS &amp;</a:t>
+            </a:r>
+          </a:p>
+          <a:p>
+            <a:pPr algn="r">
+              <a:spcBef>
+                <a:spcPts val="200"/>
+              </a:spcBef>
+            </a:pPr>
+            <a:r>
+              <a:rPr sz="900" b="1">
+                <a:solidFill>
+                  <a:srgbClr val="107C6E"/>
+                </a:solidFill>
+                <a:latin typeface="Calibri"/>
+              </a:rPr>
+              <a:t>IIID  </a:t>
+            </a:r>
+            <a:r>
+              <a:rPr sz="750">
+                <a:solidFill>
+                  <a:srgbClr val="505050"/>
+                </a:solidFill>
+                <a:latin typeface="Calibri"/>
+              </a:rPr>
+              <a:t>COMMUNICATIONS </a:t>
+            </a:r>
+            <a:r>
+              <a:rPr sz="750" b="1">
+                <a:solidFill>
+                  <a:srgbClr val="107C6E"/>
+                </a:solidFill>
+                <a:latin typeface="Calibri"/>
+              </a:rPr>
+              <a:t>ENGINEERING</a:t>
+            </a:r>
+          </a:p>
+        </p:txBody>
+      </p:sp>
+      <p:sp>
+        <p:nvSpPr>
+          <p:cNvPr id="5" name="Rectangle 4"/>
           <p:cNvSpPr/>
           <p:nvPr/>
         </p:nvSpPr>
         <p:spPr>
-          <a:xfrm>
-            <a:off x="0" y="73152"/>
-            <a:ext cx="457200" cy="6784848"/>
+          <a:xfrm rot="18900000">
+            <a:off x="7543800" y="5641848"/>
+            <a:ext cx="5029200" cy="237744"/>
           </a:xfrm>
           <a:prstGeom prst="rect">
             <a:avLst/>
           </a:prstGeom>
           <a:solidFill>
-            <a:srgbClr val="4FC3F7"/>
+            <a:srgbClr val="C4E8E2"/>
           </a:solidFill>
           <a:ln>
             <a:noFill/>
@@ -4101,56 +4248,20 @@
       </p:sp>
       <p:sp>
         <p:nvSpPr>
-          <p:cNvPr id="4" name="TextBox 3"/>
-          <p:cNvSpPr txBox="1"/>
-          <p:nvPr/>
-        </p:nvSpPr>
-        <p:spPr>
-          <a:xfrm>
-            <a:off x="731520" y="1371600"/>
-            <a:ext cx="10725912" cy="2743200"/>
-          </a:xfrm>
-          <a:prstGeom prst="rect">
-            <a:avLst/>
-          </a:prstGeom>
-          <a:noFill/>
-        </p:spPr>
-        <p:txBody>
-          <a:bodyPr wrap="square">
-            <a:spAutoFit/>
-          </a:bodyPr>
-          <a:lstStyle/>
-          <a:p>
-            <a:pPr algn="l"/>
-            <a:r>
-              <a:rPr sz="3300" b="1">
-                <a:solidFill>
-                  <a:srgbClr val="FFFFFF"/>
-                </a:solidFill>
-              </a:rPr>
-              <a:t>Review of Literature on Performance and
-Architectural Trade-offs in Kubernetes
-Container Network Interfaces</a:t>
-            </a:r>
-          </a:p>
-        </p:txBody>
-      </p:sp>
-      <p:sp>
-        <p:nvSpPr>
-          <p:cNvPr id="5" name="Rectangle 4"/>
+          <p:cNvPr id="6" name="Rectangle 5"/>
           <p:cNvSpPr/>
           <p:nvPr/>
         </p:nvSpPr>
         <p:spPr>
-          <a:xfrm>
-            <a:off x="731520" y="4206240"/>
-            <a:ext cx="10360152" cy="7315"/>
+          <a:xfrm rot="18900000">
+            <a:off x="8001000" y="5138928"/>
+            <a:ext cx="5029200" cy="237744"/>
           </a:xfrm>
           <a:prstGeom prst="rect">
             <a:avLst/>
           </a:prstGeom>
           <a:solidFill>
-            <a:srgbClr val="4FC3F7"/>
+            <a:srgbClr val="C4E8E2"/>
           </a:solidFill>
           <a:ln>
             <a:noFill/>
@@ -4180,14 +4291,135 @@
       </p:sp>
       <p:sp>
         <p:nvSpPr>
-          <p:cNvPr id="6" name="TextBox 5"/>
+          <p:cNvPr id="7" name="Rectangle 6"/>
+          <p:cNvSpPr/>
+          <p:nvPr/>
+        </p:nvSpPr>
+        <p:spPr>
+          <a:xfrm rot="18900000">
+            <a:off x="8458200" y="4636008"/>
+            <a:ext cx="5029200" cy="237744"/>
+          </a:xfrm>
+          <a:prstGeom prst="rect">
+            <a:avLst/>
+          </a:prstGeom>
+          <a:solidFill>
+            <a:srgbClr val="C4E8E2"/>
+          </a:solidFill>
+          <a:ln>
+            <a:noFill/>
+          </a:ln>
+        </p:spPr>
+        <p:style>
+          <a:lnRef idx="1">
+            <a:schemeClr val="accent1"/>
+          </a:lnRef>
+          <a:fillRef idx="3">
+            <a:schemeClr val="accent1"/>
+          </a:fillRef>
+          <a:effectRef idx="2">
+            <a:schemeClr val="accent1"/>
+          </a:effectRef>
+          <a:fontRef idx="minor">
+            <a:schemeClr val="lt1"/>
+          </a:fontRef>
+        </p:style>
+        <p:txBody>
+          <a:bodyPr rtlCol="0" anchor="ctr"/>
+          <a:lstStyle/>
+          <a:p>
+            <a:pPr algn="ctr"/>
+          </a:p>
+        </p:txBody>
+      </p:sp>
+      <p:sp>
+        <p:nvSpPr>
+          <p:cNvPr id="8" name="Rectangle 7"/>
+          <p:cNvSpPr/>
+          <p:nvPr/>
+        </p:nvSpPr>
+        <p:spPr>
+          <a:xfrm rot="18900000">
+            <a:off x="8915400" y="4133088"/>
+            <a:ext cx="5029200" cy="237744"/>
+          </a:xfrm>
+          <a:prstGeom prst="rect">
+            <a:avLst/>
+          </a:prstGeom>
+          <a:solidFill>
+            <a:srgbClr val="C4E8E2"/>
+          </a:solidFill>
+          <a:ln>
+            <a:noFill/>
+          </a:ln>
+        </p:spPr>
+        <p:style>
+          <a:lnRef idx="1">
+            <a:schemeClr val="accent1"/>
+          </a:lnRef>
+          <a:fillRef idx="3">
+            <a:schemeClr val="accent1"/>
+          </a:fillRef>
+          <a:effectRef idx="2">
+            <a:schemeClr val="accent1"/>
+          </a:effectRef>
+          <a:fontRef idx="minor">
+            <a:schemeClr val="lt1"/>
+          </a:fontRef>
+        </p:style>
+        <p:txBody>
+          <a:bodyPr rtlCol="0" anchor="ctr"/>
+          <a:lstStyle/>
+          <a:p>
+            <a:pPr algn="ctr"/>
+          </a:p>
+        </p:txBody>
+      </p:sp>
+      <p:sp>
+        <p:nvSpPr>
+          <p:cNvPr id="9" name="TextBox 8"/>
           <p:cNvSpPr txBox="1"/>
           <p:nvPr/>
         </p:nvSpPr>
         <p:spPr>
           <a:xfrm>
-            <a:off x="731520" y="4389120"/>
-            <a:ext cx="10725912" cy="1645920"/>
+            <a:off x="11137392" y="6473952"/>
+            <a:ext cx="914400" cy="320040"/>
+          </a:xfrm>
+          <a:prstGeom prst="rect">
+            <a:avLst/>
+          </a:prstGeom>
+          <a:noFill/>
+        </p:spPr>
+        <p:txBody>
+          <a:bodyPr wrap="none">
+            <a:spAutoFit/>
+          </a:bodyPr>
+          <a:lstStyle/>
+          <a:p>
+            <a:pPr algn="r"/>
+            <a:r>
+              <a:rPr sz="1000">
+                <a:solidFill>
+                  <a:srgbClr val="505050"/>
+                </a:solidFill>
+                <a:latin typeface="Calibri"/>
+              </a:rPr>
+              <a:t>1 / 8</a:t>
+            </a:r>
+          </a:p>
+        </p:txBody>
+      </p:sp>
+      <p:sp>
+        <p:nvSpPr>
+          <p:cNvPr id="10" name="TextBox 9"/>
+          <p:cNvSpPr txBox="1"/>
+          <p:nvPr/>
+        </p:nvSpPr>
+        <p:spPr>
+          <a:xfrm>
+            <a:off x="457200" y="1188720"/>
+            <a:ext cx="7132320" cy="2560320"/>
           </a:xfrm>
           <a:prstGeom prst="rect">
             <a:avLst/>
@@ -4202,12 +4434,128 @@
           <a:p>
             <a:pPr algn="l"/>
             <a:r>
-              <a:rPr sz="1700" b="0">
-                <a:solidFill>
-                  <a:srgbClr val="ADC8E6"/>
-                </a:solidFill>
-              </a:rPr>
-              <a:t>Samyak Kr Sharma  |  Roll No: MT25039  |  IIIT-Delhi  |  Research Methods Presentation</a:t>
+              <a:rPr sz="3000" b="1">
+                <a:solidFill>
+                  <a:srgbClr val="075048"/>
+                </a:solidFill>
+                <a:latin typeface="Calibri"/>
+              </a:rPr>
+              <a:t>Review of Literature on Performance and
+Architectural Trade-offs in Kubernetes
+Container Network Interfaces</a:t>
+            </a:r>
+          </a:p>
+        </p:txBody>
+      </p:sp>
+      <p:sp>
+        <p:nvSpPr>
+          <p:cNvPr id="11" name="Rectangle 10"/>
+          <p:cNvSpPr/>
+          <p:nvPr/>
+        </p:nvSpPr>
+        <p:spPr>
+          <a:xfrm>
+            <a:off x="457200" y="3886200"/>
+            <a:ext cx="7132320" cy="22860"/>
+          </a:xfrm>
+          <a:prstGeom prst="rect">
+            <a:avLst/>
+          </a:prstGeom>
+          <a:solidFill>
+            <a:srgbClr val="107C6E"/>
+          </a:solidFill>
+          <a:ln>
+            <a:noFill/>
+          </a:ln>
+        </p:spPr>
+        <p:style>
+          <a:lnRef idx="1">
+            <a:schemeClr val="accent1"/>
+          </a:lnRef>
+          <a:fillRef idx="3">
+            <a:schemeClr val="accent1"/>
+          </a:fillRef>
+          <a:effectRef idx="2">
+            <a:schemeClr val="accent1"/>
+          </a:effectRef>
+          <a:fontRef idx="minor">
+            <a:schemeClr val="lt1"/>
+          </a:fontRef>
+        </p:style>
+        <p:txBody>
+          <a:bodyPr rtlCol="0" anchor="ctr"/>
+          <a:lstStyle/>
+          <a:p>
+            <a:pPr algn="ctr"/>
+          </a:p>
+        </p:txBody>
+      </p:sp>
+      <p:sp>
+        <p:nvSpPr>
+          <p:cNvPr id="12" name="TextBox 11"/>
+          <p:cNvSpPr txBox="1"/>
+          <p:nvPr/>
+        </p:nvSpPr>
+        <p:spPr>
+          <a:xfrm>
+            <a:off x="457200" y="4096512"/>
+            <a:ext cx="7132320" cy="411480"/>
+          </a:xfrm>
+          <a:prstGeom prst="rect">
+            <a:avLst/>
+          </a:prstGeom>
+          <a:noFill/>
+        </p:spPr>
+        <p:txBody>
+          <a:bodyPr wrap="none">
+            <a:spAutoFit/>
+          </a:bodyPr>
+          <a:lstStyle/>
+          <a:p>
+            <a:pPr algn="l"/>
+            <a:r>
+              <a:rPr sz="1700">
+                <a:solidFill>
+                  <a:srgbClr val="1A1A1A"/>
+                </a:solidFill>
+                <a:latin typeface="Calibri"/>
+              </a:rPr>
+              <a:t>Samyak Kr Sharma</a:t>
+            </a:r>
+          </a:p>
+        </p:txBody>
+      </p:sp>
+      <p:sp>
+        <p:nvSpPr>
+          <p:cNvPr id="13" name="TextBox 12"/>
+          <p:cNvSpPr txBox="1"/>
+          <p:nvPr/>
+        </p:nvSpPr>
+        <p:spPr>
+          <a:xfrm>
+            <a:off x="457200" y="4617720"/>
+            <a:ext cx="7132320" cy="411480"/>
+          </a:xfrm>
+          <a:prstGeom prst="rect">
+            <a:avLst/>
+          </a:prstGeom>
+          <a:noFill/>
+        </p:spPr>
+        <p:txBody>
+          <a:bodyPr wrap="none">
+            <a:spAutoFit/>
+          </a:bodyPr>
+          <a:lstStyle/>
+          <a:p>
+            <a:pPr algn="l"/>
+            <a:r>
+              <a:rPr sz="1300">
+                <a:solidFill>
+                  <a:srgbClr val="505050"/>
+                </a:solidFill>
+                <a:latin typeface="Calibri"/>
+              </a:rPr>
+              <a:t>Roll No: MT25039  |  IIIT-Delhi  |  Research Methods Presentation</a:t>
             </a:r>
           </a:p>
         </p:txBody>
@@ -4226,7 +4574,7 @@
     <p:bg>
       <p:bgPr>
         <a:solidFill>
-          <a:srgbClr val="0D1B2A"/>
+          <a:srgbClr val="FFFFFF"/>
         </a:solidFill>
         <a:effectLst/>
       </p:bgPr>
@@ -4246,14 +4594,14 @@
         </p:nvSpPr>
         <p:spPr>
           <a:xfrm>
-            <a:off x="0" y="73152"/>
-            <a:ext cx="12188952" cy="41148"/>
+            <a:off x="0" y="548640"/>
+            <a:ext cx="12188952" cy="10972"/>
           </a:xfrm>
           <a:prstGeom prst="rect">
             <a:avLst/>
           </a:prstGeom>
           <a:solidFill>
-            <a:srgbClr val="4FC3F7"/>
+            <a:srgbClr val="BBBBBB"/>
           </a:solidFill>
           <a:ln>
             <a:noFill/>
@@ -4289,15 +4637,13 @@
         </p:nvSpPr>
         <p:spPr>
           <a:xfrm>
-            <a:off x="10332720" y="137160"/>
-            <a:ext cx="1828800" cy="365760"/>
-          </a:xfrm>
-          <a:prstGeom prst="rect">
-            <a:avLst/>
-          </a:prstGeom>
-          <a:solidFill>
-            <a:srgbClr val="4FC3F7"/>
-          </a:solidFill>
+            <a:off x="164592" y="54864"/>
+            <a:ext cx="4389120" cy="493776"/>
+          </a:xfrm>
+          <a:prstGeom prst="rect">
+            <a:avLst/>
+          </a:prstGeom>
+          <a:noFill/>
         </p:spPr>
         <p:txBody>
           <a:bodyPr wrap="none">
@@ -4305,76 +4651,69 @@
           </a:bodyPr>
           <a:lstStyle/>
           <a:p>
-            <a:pPr algn="ctr"/>
-            <a:r>
-              <a:rPr sz="1100" b="1">
-                <a:solidFill>
-                  <a:srgbClr val="0D1B2A"/>
-                </a:solidFill>
-              </a:rPr>
-              <a:t>CONTEXT</a:t>
-            </a:r>
-          </a:p>
-        </p:txBody>
-      </p:sp>
-      <p:sp>
-        <p:nvSpPr>
-          <p:cNvPr id="4" name="TextBox 3"/>
-          <p:cNvSpPr txBox="1"/>
-          <p:nvPr/>
-        </p:nvSpPr>
-        <p:spPr>
-          <a:xfrm>
-            <a:off x="457200" y="182880"/>
-            <a:ext cx="11274552" cy="822960"/>
-          </a:xfrm>
-          <a:prstGeom prst="rect">
-            <a:avLst/>
-          </a:prstGeom>
-          <a:noFill/>
-        </p:spPr>
-        <p:txBody>
-          <a:bodyPr wrap="square">
-            <a:spAutoFit/>
-          </a:bodyPr>
-          <a:lstStyle/>
-          <a:p>
             <a:pPr algn="l"/>
             <a:r>
-              <a:rPr b="0" i="0" sz="3000">
-                <a:solidFill>
-                  <a:srgbClr val="FFFFFF"/>
-                </a:solidFill>
-              </a:rPr>
-              <a:t>Kubernetes Scales, But the </a:t>
-            </a:r>
-            <a:r>
-              <a:rPr b="1" i="0" sz="3000">
-                <a:solidFill>
-                  <a:srgbClr val="FFD166"/>
-                </a:solidFill>
-              </a:rPr>
-              <a:t>Network Lags</a:t>
-            </a:r>
-          </a:p>
-        </p:txBody>
-      </p:sp>
-      <p:sp>
-        <p:nvSpPr>
-          <p:cNvPr id="5" name="Rectangle 4"/>
+              <a:rPr sz="1700" b="1">
+                <a:solidFill>
+                  <a:srgbClr val="107C6E"/>
+                </a:solidFill>
+                <a:latin typeface="Calibri"/>
+              </a:rPr>
+              <a:t>IIID</a:t>
+            </a:r>
+            <a:r>
+              <a:rPr sz="750">
+                <a:solidFill>
+                  <a:srgbClr val="505050"/>
+                </a:solidFill>
+                <a:latin typeface="Calibri"/>
+              </a:rPr>
+              <a:t>   INDRAPRASTHA INSTITUTE of</a:t>
+            </a:r>
+          </a:p>
+          <a:p>
+            <a:pPr algn="l">
+              <a:spcBef>
+                <a:spcPts val="0"/>
+              </a:spcBef>
+            </a:pPr>
+            <a:r>
+              <a:rPr sz="750">
+                <a:solidFill>
+                  <a:srgbClr val="505050"/>
+                </a:solidFill>
+                <a:latin typeface="Calibri"/>
+              </a:rPr>
+              <a:t>           INFORMATION TECHNOLOGY </a:t>
+            </a:r>
+            <a:r>
+              <a:rPr sz="750" b="1">
+                <a:solidFill>
+                  <a:srgbClr val="107C6E"/>
+                </a:solidFill>
+                <a:latin typeface="Calibri"/>
+              </a:rPr>
+              <a:t>DELHI</a:t>
+            </a:r>
+          </a:p>
+        </p:txBody>
+      </p:sp>
+      <p:sp>
+        <p:nvSpPr>
+          <p:cNvPr id="4" name="Rectangle 3"/>
           <p:cNvSpPr/>
           <p:nvPr/>
         </p:nvSpPr>
         <p:spPr>
-          <a:xfrm>
-            <a:off x="457200" y="1051560"/>
-            <a:ext cx="11274552" cy="7315"/>
+          <a:xfrm rot="18900000">
+            <a:off x="7543800" y="5641848"/>
+            <a:ext cx="5029200" cy="237744"/>
           </a:xfrm>
           <a:prstGeom prst="rect">
             <a:avLst/>
           </a:prstGeom>
           <a:solidFill>
-            <a:srgbClr val="4FC3F7"/>
+            <a:srgbClr val="C4E8E2"/>
           </a:solidFill>
           <a:ln>
             <a:noFill/>
@@ -4404,14 +4743,178 @@
       </p:sp>
       <p:sp>
         <p:nvSpPr>
-          <p:cNvPr id="6" name="TextBox 5"/>
+          <p:cNvPr id="5" name="Rectangle 4"/>
+          <p:cNvSpPr/>
+          <p:nvPr/>
+        </p:nvSpPr>
+        <p:spPr>
+          <a:xfrm rot="18900000">
+            <a:off x="8001000" y="5138928"/>
+            <a:ext cx="5029200" cy="237744"/>
+          </a:xfrm>
+          <a:prstGeom prst="rect">
+            <a:avLst/>
+          </a:prstGeom>
+          <a:solidFill>
+            <a:srgbClr val="C4E8E2"/>
+          </a:solidFill>
+          <a:ln>
+            <a:noFill/>
+          </a:ln>
+        </p:spPr>
+        <p:style>
+          <a:lnRef idx="1">
+            <a:schemeClr val="accent1"/>
+          </a:lnRef>
+          <a:fillRef idx="3">
+            <a:schemeClr val="accent1"/>
+          </a:fillRef>
+          <a:effectRef idx="2">
+            <a:schemeClr val="accent1"/>
+          </a:effectRef>
+          <a:fontRef idx="minor">
+            <a:schemeClr val="lt1"/>
+          </a:fontRef>
+        </p:style>
+        <p:txBody>
+          <a:bodyPr rtlCol="0" anchor="ctr"/>
+          <a:lstStyle/>
+          <a:p>
+            <a:pPr algn="ctr"/>
+          </a:p>
+        </p:txBody>
+      </p:sp>
+      <p:sp>
+        <p:nvSpPr>
+          <p:cNvPr id="6" name="Rectangle 5"/>
+          <p:cNvSpPr/>
+          <p:nvPr/>
+        </p:nvSpPr>
+        <p:spPr>
+          <a:xfrm rot="18900000">
+            <a:off x="8458200" y="4636008"/>
+            <a:ext cx="5029200" cy="237744"/>
+          </a:xfrm>
+          <a:prstGeom prst="rect">
+            <a:avLst/>
+          </a:prstGeom>
+          <a:solidFill>
+            <a:srgbClr val="C4E8E2"/>
+          </a:solidFill>
+          <a:ln>
+            <a:noFill/>
+          </a:ln>
+        </p:spPr>
+        <p:style>
+          <a:lnRef idx="1">
+            <a:schemeClr val="accent1"/>
+          </a:lnRef>
+          <a:fillRef idx="3">
+            <a:schemeClr val="accent1"/>
+          </a:fillRef>
+          <a:effectRef idx="2">
+            <a:schemeClr val="accent1"/>
+          </a:effectRef>
+          <a:fontRef idx="minor">
+            <a:schemeClr val="lt1"/>
+          </a:fontRef>
+        </p:style>
+        <p:txBody>
+          <a:bodyPr rtlCol="0" anchor="ctr"/>
+          <a:lstStyle/>
+          <a:p>
+            <a:pPr algn="ctr"/>
+          </a:p>
+        </p:txBody>
+      </p:sp>
+      <p:sp>
+        <p:nvSpPr>
+          <p:cNvPr id="7" name="Rectangle 6"/>
+          <p:cNvSpPr/>
+          <p:nvPr/>
+        </p:nvSpPr>
+        <p:spPr>
+          <a:xfrm rot="18900000">
+            <a:off x="8915400" y="4133088"/>
+            <a:ext cx="5029200" cy="237744"/>
+          </a:xfrm>
+          <a:prstGeom prst="rect">
+            <a:avLst/>
+          </a:prstGeom>
+          <a:solidFill>
+            <a:srgbClr val="C4E8E2"/>
+          </a:solidFill>
+          <a:ln>
+            <a:noFill/>
+          </a:ln>
+        </p:spPr>
+        <p:style>
+          <a:lnRef idx="1">
+            <a:schemeClr val="accent1"/>
+          </a:lnRef>
+          <a:fillRef idx="3">
+            <a:schemeClr val="accent1"/>
+          </a:fillRef>
+          <a:effectRef idx="2">
+            <a:schemeClr val="accent1"/>
+          </a:effectRef>
+          <a:fontRef idx="minor">
+            <a:schemeClr val="lt1"/>
+          </a:fontRef>
+        </p:style>
+        <p:txBody>
+          <a:bodyPr rtlCol="0" anchor="ctr"/>
+          <a:lstStyle/>
+          <a:p>
+            <a:pPr algn="ctr"/>
+          </a:p>
+        </p:txBody>
+      </p:sp>
+      <p:sp>
+        <p:nvSpPr>
+          <p:cNvPr id="8" name="TextBox 7"/>
           <p:cNvSpPr txBox="1"/>
           <p:nvPr/>
         </p:nvSpPr>
         <p:spPr>
           <a:xfrm>
-            <a:off x="457200" y="1188720"/>
-            <a:ext cx="11274552" cy="5029200"/>
+            <a:off x="11137392" y="6473952"/>
+            <a:ext cx="914400" cy="320040"/>
+          </a:xfrm>
+          <a:prstGeom prst="rect">
+            <a:avLst/>
+          </a:prstGeom>
+          <a:noFill/>
+        </p:spPr>
+        <p:txBody>
+          <a:bodyPr wrap="none">
+            <a:spAutoFit/>
+          </a:bodyPr>
+          <a:lstStyle/>
+          <a:p>
+            <a:pPr algn="r"/>
+            <a:r>
+              <a:rPr sz="1000">
+                <a:solidFill>
+                  <a:srgbClr val="505050"/>
+                </a:solidFill>
+                <a:latin typeface="Calibri"/>
+              </a:rPr>
+              <a:t>2 / 8</a:t>
+            </a:r>
+          </a:p>
+        </p:txBody>
+      </p:sp>
+      <p:sp>
+        <p:nvSpPr>
+          <p:cNvPr id="9" name="TextBox 8"/>
+          <p:cNvSpPr txBox="1"/>
+          <p:nvPr/>
+        </p:nvSpPr>
+        <p:spPr>
+          <a:xfrm>
+            <a:off x="457200" y="685800"/>
+            <a:ext cx="11274552" cy="594360"/>
           </a:xfrm>
           <a:prstGeom prst="rect">
             <a:avLst/>
@@ -4424,35 +4927,125 @@
           </a:bodyPr>
           <a:lstStyle/>
           <a:p>
+            <a:pPr algn="l"/>
+            <a:r>
+              <a:rPr sz="2200" b="1">
+                <a:solidFill>
+                  <a:srgbClr val="107C6E"/>
+                </a:solidFill>
+                <a:latin typeface="Calibri"/>
+              </a:rPr>
+              <a:t>1.  </a:t>
+            </a:r>
+            <a:r>
+              <a:rPr sz="2200" b="1">
+                <a:solidFill>
+                  <a:srgbClr val="107C6E"/>
+                </a:solidFill>
+                <a:latin typeface="Calibri"/>
+              </a:rPr>
+              <a:t>Kubernetes Scales, But the Network Lags</a:t>
+            </a:r>
+          </a:p>
+        </p:txBody>
+      </p:sp>
+      <p:sp>
+        <p:nvSpPr>
+          <p:cNvPr id="10" name="Rectangle 9"/>
+          <p:cNvSpPr/>
+          <p:nvPr/>
+        </p:nvSpPr>
+        <p:spPr>
+          <a:xfrm>
+            <a:off x="457200" y="1252728"/>
+            <a:ext cx="11274552" cy="22860"/>
+          </a:xfrm>
+          <a:prstGeom prst="rect">
+            <a:avLst/>
+          </a:prstGeom>
+          <a:solidFill>
+            <a:srgbClr val="107C6E"/>
+          </a:solidFill>
+          <a:ln>
+            <a:noFill/>
+          </a:ln>
+        </p:spPr>
+        <p:style>
+          <a:lnRef idx="1">
+            <a:schemeClr val="accent1"/>
+          </a:lnRef>
+          <a:fillRef idx="3">
+            <a:schemeClr val="accent1"/>
+          </a:fillRef>
+          <a:effectRef idx="2">
+            <a:schemeClr val="accent1"/>
+          </a:effectRef>
+          <a:fontRef idx="minor">
+            <a:schemeClr val="lt1"/>
+          </a:fontRef>
+        </p:style>
+        <p:txBody>
+          <a:bodyPr rtlCol="0" anchor="ctr"/>
+          <a:lstStyle/>
+          <a:p>
+            <a:pPr algn="ctr"/>
+          </a:p>
+        </p:txBody>
+      </p:sp>
+      <p:sp>
+        <p:nvSpPr>
+          <p:cNvPr id="11" name="TextBox 10"/>
+          <p:cNvSpPr txBox="1"/>
+          <p:nvPr/>
+        </p:nvSpPr>
+        <p:spPr>
+          <a:xfrm>
+            <a:off x="457200" y="1325880"/>
+            <a:ext cx="11274552" cy="5166360"/>
+          </a:xfrm>
+          <a:prstGeom prst="rect">
+            <a:avLst/>
+          </a:prstGeom>
+          <a:noFill/>
+        </p:spPr>
+        <p:txBody>
+          <a:bodyPr wrap="square">
+            <a:spAutoFit/>
+          </a:bodyPr>
+          <a:lstStyle/>
+          <a:p>
             <a:pPr algn="l">
               <a:spcBef>
-                <a:spcPts val="600"/>
+                <a:spcPts val="1100"/>
               </a:spcBef>
               <a:spcAft>
                 <a:spcPts val="0"/>
               </a:spcAft>
             </a:pPr>
             <a:r>
-              <a:rPr sz="2000" b="0">
-                <a:solidFill>
-                  <a:srgbClr val="4FC3F7"/>
-                </a:solidFill>
-              </a:rPr>
-              <a:t>▸  </a:t>
-            </a:r>
-            <a:r>
-              <a:rPr b="1" i="0" sz="2200">
-                <a:solidFill>
-                  <a:srgbClr val="FFD166"/>
-                </a:solidFill>
+              <a:rPr sz="1700">
+                <a:solidFill>
+                  <a:srgbClr val="1A1A1A"/>
+                </a:solidFill>
+                <a:latin typeface="Calibri"/>
+              </a:rPr>
+              <a:t>•  </a:t>
+            </a:r>
+            <a:r>
+              <a:rPr sz="1700" b="1">
+                <a:solidFill>
+                  <a:srgbClr val="075048"/>
+                </a:solidFill>
+                <a:latin typeface="Calibri"/>
               </a:rPr>
               <a:t>Orchestration Standard:</a:t>
             </a:r>
             <a:r>
-              <a:rPr b="0" i="0" sz="2200">
-                <a:solidFill>
-                  <a:srgbClr val="E0EAF6"/>
-                </a:solidFill>
+              <a:rPr sz="1700" b="0">
+                <a:solidFill>
+                  <a:srgbClr val="1A1A1A"/>
+                </a:solidFill>
+                <a:latin typeface="Calibri"/>
               </a:rPr>
               <a:t> Kubernetes orchestrates workloads from massive clouds to constrained edge environments.</a:t>
             </a:r>
@@ -4460,33 +5053,36 @@
           <a:p>
             <a:pPr algn="l">
               <a:spcBef>
-                <a:spcPts val="600"/>
+                <a:spcPts val="1100"/>
               </a:spcBef>
               <a:spcAft>
                 <a:spcPts val="0"/>
               </a:spcAft>
             </a:pPr>
             <a:r>
-              <a:rPr sz="2000" b="0">
-                <a:solidFill>
-                  <a:srgbClr val="4FC3F7"/>
-                </a:solidFill>
-              </a:rPr>
-              <a:t>▸  </a:t>
-            </a:r>
-            <a:r>
-              <a:rPr b="1" i="0" sz="2200">
-                <a:solidFill>
-                  <a:srgbClr val="FFD166"/>
-                </a:solidFill>
+              <a:rPr sz="1700">
+                <a:solidFill>
+                  <a:srgbClr val="1A1A1A"/>
+                </a:solidFill>
+                <a:latin typeface="Calibri"/>
+              </a:rPr>
+              <a:t>•  </a:t>
+            </a:r>
+            <a:r>
+              <a:rPr sz="1700" b="1">
+                <a:solidFill>
+                  <a:srgbClr val="075048"/>
+                </a:solidFill>
+                <a:latin typeface="Calibri"/>
               </a:rPr>
               <a:t>The CNI Role:</a:t>
             </a:r>
             <a:r>
-              <a:rPr b="0" i="0" sz="2200">
-                <a:solidFill>
-                  <a:srgbClr val="E0EAF6"/>
-                </a:solidFill>
+              <a:rPr sz="1700" b="0">
+                <a:solidFill>
+                  <a:srgbClr val="1A1A1A"/>
+                </a:solidFill>
+                <a:latin typeface="Calibri"/>
               </a:rPr>
               <a:t> The Container Network Interface (CNI) dictates all pod-to-node communication flows.</a:t>
             </a:r>
@@ -4494,33 +5090,36 @@
           <a:p>
             <a:pPr algn="l">
               <a:spcBef>
-                <a:spcPts val="600"/>
+                <a:spcPts val="1100"/>
               </a:spcBef>
               <a:spcAft>
                 <a:spcPts val="0"/>
               </a:spcAft>
             </a:pPr>
             <a:r>
-              <a:rPr sz="2000" b="0">
-                <a:solidFill>
-                  <a:srgbClr val="4FC3F7"/>
-                </a:solidFill>
-              </a:rPr>
-              <a:t>▸  </a:t>
-            </a:r>
-            <a:r>
-              <a:rPr b="1" i="0" sz="2200">
-                <a:solidFill>
-                  <a:srgbClr val="FFD166"/>
-                </a:solidFill>
+              <a:rPr sz="1700">
+                <a:solidFill>
+                  <a:srgbClr val="1A1A1A"/>
+                </a:solidFill>
+                <a:latin typeface="Calibri"/>
+              </a:rPr>
+              <a:t>•  </a:t>
+            </a:r>
+            <a:r>
+              <a:rPr sz="1700" b="1">
+                <a:solidFill>
+                  <a:srgbClr val="075048"/>
+                </a:solidFill>
+                <a:latin typeface="Calibri"/>
               </a:rPr>
               <a:t>Evolving Demands:</a:t>
             </a:r>
             <a:r>
-              <a:rPr b="0" i="0" sz="2200">
-                <a:solidFill>
-                  <a:srgbClr val="E0EAF6"/>
-                </a:solidFill>
+              <a:rPr sz="1700" b="0">
+                <a:solidFill>
+                  <a:srgbClr val="1A1A1A"/>
+                </a:solidFill>
+                <a:latin typeface="Calibri"/>
               </a:rPr>
               <a:t> Modern data-intensive workloads require microsecond latency and high throughput.</a:t>
             </a:r>
@@ -4541,7 +5140,7 @@
     <p:bg>
       <p:bgPr>
         <a:solidFill>
-          <a:srgbClr val="0D1B2A"/>
+          <a:srgbClr val="FFFFFF"/>
         </a:solidFill>
         <a:effectLst/>
       </p:bgPr>
@@ -4561,14 +5160,14 @@
         </p:nvSpPr>
         <p:spPr>
           <a:xfrm>
-            <a:off x="0" y="73152"/>
-            <a:ext cx="12188952" cy="41148"/>
+            <a:off x="0" y="548640"/>
+            <a:ext cx="12188952" cy="10972"/>
           </a:xfrm>
           <a:prstGeom prst="rect">
             <a:avLst/>
           </a:prstGeom>
           <a:solidFill>
-            <a:srgbClr val="4FC3F7"/>
+            <a:srgbClr val="BBBBBB"/>
           </a:solidFill>
           <a:ln>
             <a:noFill/>
@@ -4604,15 +5203,13 @@
         </p:nvSpPr>
         <p:spPr>
           <a:xfrm>
-            <a:off x="9875520" y="137160"/>
-            <a:ext cx="1828800" cy="365760"/>
-          </a:xfrm>
-          <a:prstGeom prst="rect">
-            <a:avLst/>
-          </a:prstGeom>
-          <a:solidFill>
-            <a:srgbClr val="4FC3F7"/>
-          </a:solidFill>
+            <a:off x="164592" y="54864"/>
+            <a:ext cx="4389120" cy="493776"/>
+          </a:xfrm>
+          <a:prstGeom prst="rect">
+            <a:avLst/>
+          </a:prstGeom>
+          <a:noFill/>
         </p:spPr>
         <p:txBody>
           <a:bodyPr wrap="none">
@@ -4620,76 +5217,69 @@
           </a:bodyPr>
           <a:lstStyle/>
           <a:p>
-            <a:pPr algn="ctr"/>
-            <a:r>
-              <a:rPr sz="1100" b="1">
-                <a:solidFill>
-                  <a:srgbClr val="0D1B2A"/>
-                </a:solidFill>
-              </a:rPr>
-              <a:t>THE PROBLEM</a:t>
-            </a:r>
-          </a:p>
-        </p:txBody>
-      </p:sp>
-      <p:sp>
-        <p:nvSpPr>
-          <p:cNvPr id="4" name="TextBox 3"/>
-          <p:cNvSpPr txBox="1"/>
-          <p:nvPr/>
-        </p:nvSpPr>
-        <p:spPr>
-          <a:xfrm>
-            <a:off x="457200" y="182880"/>
-            <a:ext cx="11274552" cy="822960"/>
-          </a:xfrm>
-          <a:prstGeom prst="rect">
-            <a:avLst/>
-          </a:prstGeom>
-          <a:noFill/>
-        </p:spPr>
-        <p:txBody>
-          <a:bodyPr wrap="square">
-            <a:spAutoFit/>
-          </a:bodyPr>
-          <a:lstStyle/>
-          <a:p>
             <a:pPr algn="l"/>
             <a:r>
-              <a:rPr b="0" i="0" sz="3000">
-                <a:solidFill>
-                  <a:srgbClr val="FFFFFF"/>
-                </a:solidFill>
-              </a:rPr>
-              <a:t>The Heavy Toll of </a:t>
-            </a:r>
-            <a:r>
-              <a:rPr b="1" i="0" sz="3000">
-                <a:solidFill>
-                  <a:srgbClr val="FFD166"/>
-                </a:solidFill>
-              </a:rPr>
-              <a:t>Traditional Network Overlays</a:t>
-            </a:r>
-          </a:p>
-        </p:txBody>
-      </p:sp>
-      <p:sp>
-        <p:nvSpPr>
-          <p:cNvPr id="5" name="Rectangle 4"/>
+              <a:rPr sz="1700" b="1">
+                <a:solidFill>
+                  <a:srgbClr val="107C6E"/>
+                </a:solidFill>
+                <a:latin typeface="Calibri"/>
+              </a:rPr>
+              <a:t>IIID</a:t>
+            </a:r>
+            <a:r>
+              <a:rPr sz="750">
+                <a:solidFill>
+                  <a:srgbClr val="505050"/>
+                </a:solidFill>
+                <a:latin typeface="Calibri"/>
+              </a:rPr>
+              <a:t>   INDRAPRASTHA INSTITUTE of</a:t>
+            </a:r>
+          </a:p>
+          <a:p>
+            <a:pPr algn="l">
+              <a:spcBef>
+                <a:spcPts val="0"/>
+              </a:spcBef>
+            </a:pPr>
+            <a:r>
+              <a:rPr sz="750">
+                <a:solidFill>
+                  <a:srgbClr val="505050"/>
+                </a:solidFill>
+                <a:latin typeface="Calibri"/>
+              </a:rPr>
+              <a:t>           INFORMATION TECHNOLOGY </a:t>
+            </a:r>
+            <a:r>
+              <a:rPr sz="750" b="1">
+                <a:solidFill>
+                  <a:srgbClr val="107C6E"/>
+                </a:solidFill>
+                <a:latin typeface="Calibri"/>
+              </a:rPr>
+              <a:t>DELHI</a:t>
+            </a:r>
+          </a:p>
+        </p:txBody>
+      </p:sp>
+      <p:sp>
+        <p:nvSpPr>
+          <p:cNvPr id="4" name="Rectangle 3"/>
           <p:cNvSpPr/>
           <p:nvPr/>
         </p:nvSpPr>
         <p:spPr>
-          <a:xfrm>
-            <a:off x="457200" y="1051560"/>
-            <a:ext cx="11274552" cy="7315"/>
+          <a:xfrm rot="18900000">
+            <a:off x="7543800" y="5641848"/>
+            <a:ext cx="5029200" cy="237744"/>
           </a:xfrm>
           <a:prstGeom prst="rect">
             <a:avLst/>
           </a:prstGeom>
           <a:solidFill>
-            <a:srgbClr val="4FC3F7"/>
+            <a:srgbClr val="C4E8E2"/>
           </a:solidFill>
           <a:ln>
             <a:noFill/>
@@ -4719,14 +5309,178 @@
       </p:sp>
       <p:sp>
         <p:nvSpPr>
-          <p:cNvPr id="6" name="TextBox 5"/>
+          <p:cNvPr id="5" name="Rectangle 4"/>
+          <p:cNvSpPr/>
+          <p:nvPr/>
+        </p:nvSpPr>
+        <p:spPr>
+          <a:xfrm rot="18900000">
+            <a:off x="8001000" y="5138928"/>
+            <a:ext cx="5029200" cy="237744"/>
+          </a:xfrm>
+          <a:prstGeom prst="rect">
+            <a:avLst/>
+          </a:prstGeom>
+          <a:solidFill>
+            <a:srgbClr val="C4E8E2"/>
+          </a:solidFill>
+          <a:ln>
+            <a:noFill/>
+          </a:ln>
+        </p:spPr>
+        <p:style>
+          <a:lnRef idx="1">
+            <a:schemeClr val="accent1"/>
+          </a:lnRef>
+          <a:fillRef idx="3">
+            <a:schemeClr val="accent1"/>
+          </a:fillRef>
+          <a:effectRef idx="2">
+            <a:schemeClr val="accent1"/>
+          </a:effectRef>
+          <a:fontRef idx="minor">
+            <a:schemeClr val="lt1"/>
+          </a:fontRef>
+        </p:style>
+        <p:txBody>
+          <a:bodyPr rtlCol="0" anchor="ctr"/>
+          <a:lstStyle/>
+          <a:p>
+            <a:pPr algn="ctr"/>
+          </a:p>
+        </p:txBody>
+      </p:sp>
+      <p:sp>
+        <p:nvSpPr>
+          <p:cNvPr id="6" name="Rectangle 5"/>
+          <p:cNvSpPr/>
+          <p:nvPr/>
+        </p:nvSpPr>
+        <p:spPr>
+          <a:xfrm rot="18900000">
+            <a:off x="8458200" y="4636008"/>
+            <a:ext cx="5029200" cy="237744"/>
+          </a:xfrm>
+          <a:prstGeom prst="rect">
+            <a:avLst/>
+          </a:prstGeom>
+          <a:solidFill>
+            <a:srgbClr val="C4E8E2"/>
+          </a:solidFill>
+          <a:ln>
+            <a:noFill/>
+          </a:ln>
+        </p:spPr>
+        <p:style>
+          <a:lnRef idx="1">
+            <a:schemeClr val="accent1"/>
+          </a:lnRef>
+          <a:fillRef idx="3">
+            <a:schemeClr val="accent1"/>
+          </a:fillRef>
+          <a:effectRef idx="2">
+            <a:schemeClr val="accent1"/>
+          </a:effectRef>
+          <a:fontRef idx="minor">
+            <a:schemeClr val="lt1"/>
+          </a:fontRef>
+        </p:style>
+        <p:txBody>
+          <a:bodyPr rtlCol="0" anchor="ctr"/>
+          <a:lstStyle/>
+          <a:p>
+            <a:pPr algn="ctr"/>
+          </a:p>
+        </p:txBody>
+      </p:sp>
+      <p:sp>
+        <p:nvSpPr>
+          <p:cNvPr id="7" name="Rectangle 6"/>
+          <p:cNvSpPr/>
+          <p:nvPr/>
+        </p:nvSpPr>
+        <p:spPr>
+          <a:xfrm rot="18900000">
+            <a:off x="8915400" y="4133088"/>
+            <a:ext cx="5029200" cy="237744"/>
+          </a:xfrm>
+          <a:prstGeom prst="rect">
+            <a:avLst/>
+          </a:prstGeom>
+          <a:solidFill>
+            <a:srgbClr val="C4E8E2"/>
+          </a:solidFill>
+          <a:ln>
+            <a:noFill/>
+          </a:ln>
+        </p:spPr>
+        <p:style>
+          <a:lnRef idx="1">
+            <a:schemeClr val="accent1"/>
+          </a:lnRef>
+          <a:fillRef idx="3">
+            <a:schemeClr val="accent1"/>
+          </a:fillRef>
+          <a:effectRef idx="2">
+            <a:schemeClr val="accent1"/>
+          </a:effectRef>
+          <a:fontRef idx="minor">
+            <a:schemeClr val="lt1"/>
+          </a:fontRef>
+        </p:style>
+        <p:txBody>
+          <a:bodyPr rtlCol="0" anchor="ctr"/>
+          <a:lstStyle/>
+          <a:p>
+            <a:pPr algn="ctr"/>
+          </a:p>
+        </p:txBody>
+      </p:sp>
+      <p:sp>
+        <p:nvSpPr>
+          <p:cNvPr id="8" name="TextBox 7"/>
           <p:cNvSpPr txBox="1"/>
           <p:nvPr/>
         </p:nvSpPr>
         <p:spPr>
           <a:xfrm>
-            <a:off x="457200" y="1188720"/>
-            <a:ext cx="11274552" cy="5029200"/>
+            <a:off x="11137392" y="6473952"/>
+            <a:ext cx="914400" cy="320040"/>
+          </a:xfrm>
+          <a:prstGeom prst="rect">
+            <a:avLst/>
+          </a:prstGeom>
+          <a:noFill/>
+        </p:spPr>
+        <p:txBody>
+          <a:bodyPr wrap="none">
+            <a:spAutoFit/>
+          </a:bodyPr>
+          <a:lstStyle/>
+          <a:p>
+            <a:pPr algn="r"/>
+            <a:r>
+              <a:rPr sz="1000">
+                <a:solidFill>
+                  <a:srgbClr val="505050"/>
+                </a:solidFill>
+                <a:latin typeface="Calibri"/>
+              </a:rPr>
+              <a:t>3 / 8</a:t>
+            </a:r>
+          </a:p>
+        </p:txBody>
+      </p:sp>
+      <p:sp>
+        <p:nvSpPr>
+          <p:cNvPr id="9" name="TextBox 8"/>
+          <p:cNvSpPr txBox="1"/>
+          <p:nvPr/>
+        </p:nvSpPr>
+        <p:spPr>
+          <a:xfrm>
+            <a:off x="457200" y="685800"/>
+            <a:ext cx="11274552" cy="594360"/>
           </a:xfrm>
           <a:prstGeom prst="rect">
             <a:avLst/>
@@ -4739,35 +5493,125 @@
           </a:bodyPr>
           <a:lstStyle/>
           <a:p>
+            <a:pPr algn="l"/>
+            <a:r>
+              <a:rPr sz="2200" b="1">
+                <a:solidFill>
+                  <a:srgbClr val="107C6E"/>
+                </a:solidFill>
+                <a:latin typeface="Calibri"/>
+              </a:rPr>
+              <a:t>2.  </a:t>
+            </a:r>
+            <a:r>
+              <a:rPr sz="2200" b="1">
+                <a:solidFill>
+                  <a:srgbClr val="107C6E"/>
+                </a:solidFill>
+                <a:latin typeface="Calibri"/>
+              </a:rPr>
+              <a:t>The Heavy Toll of Traditional Network Overlays</a:t>
+            </a:r>
+          </a:p>
+        </p:txBody>
+      </p:sp>
+      <p:sp>
+        <p:nvSpPr>
+          <p:cNvPr id="10" name="Rectangle 9"/>
+          <p:cNvSpPr/>
+          <p:nvPr/>
+        </p:nvSpPr>
+        <p:spPr>
+          <a:xfrm>
+            <a:off x="457200" y="1252728"/>
+            <a:ext cx="11274552" cy="22860"/>
+          </a:xfrm>
+          <a:prstGeom prst="rect">
+            <a:avLst/>
+          </a:prstGeom>
+          <a:solidFill>
+            <a:srgbClr val="107C6E"/>
+          </a:solidFill>
+          <a:ln>
+            <a:noFill/>
+          </a:ln>
+        </p:spPr>
+        <p:style>
+          <a:lnRef idx="1">
+            <a:schemeClr val="accent1"/>
+          </a:lnRef>
+          <a:fillRef idx="3">
+            <a:schemeClr val="accent1"/>
+          </a:fillRef>
+          <a:effectRef idx="2">
+            <a:schemeClr val="accent1"/>
+          </a:effectRef>
+          <a:fontRef idx="minor">
+            <a:schemeClr val="lt1"/>
+          </a:fontRef>
+        </p:style>
+        <p:txBody>
+          <a:bodyPr rtlCol="0" anchor="ctr"/>
+          <a:lstStyle/>
+          <a:p>
+            <a:pPr algn="ctr"/>
+          </a:p>
+        </p:txBody>
+      </p:sp>
+      <p:sp>
+        <p:nvSpPr>
+          <p:cNvPr id="11" name="TextBox 10"/>
+          <p:cNvSpPr txBox="1"/>
+          <p:nvPr/>
+        </p:nvSpPr>
+        <p:spPr>
+          <a:xfrm>
+            <a:off x="457200" y="1325880"/>
+            <a:ext cx="11274552" cy="5166360"/>
+          </a:xfrm>
+          <a:prstGeom prst="rect">
+            <a:avLst/>
+          </a:prstGeom>
+          <a:noFill/>
+        </p:spPr>
+        <p:txBody>
+          <a:bodyPr wrap="square">
+            <a:spAutoFit/>
+          </a:bodyPr>
+          <a:lstStyle/>
+          <a:p>
             <a:pPr algn="l">
               <a:spcBef>
-                <a:spcPts val="600"/>
+                <a:spcPts val="1100"/>
               </a:spcBef>
               <a:spcAft>
                 <a:spcPts val="0"/>
               </a:spcAft>
             </a:pPr>
             <a:r>
-              <a:rPr sz="2000" b="0">
-                <a:solidFill>
-                  <a:srgbClr val="4FC3F7"/>
-                </a:solidFill>
-              </a:rPr>
-              <a:t>▸  </a:t>
-            </a:r>
-            <a:r>
-              <a:rPr b="1" i="0" sz="2200">
-                <a:solidFill>
-                  <a:srgbClr val="FFD166"/>
-                </a:solidFill>
+              <a:rPr sz="1700">
+                <a:solidFill>
+                  <a:srgbClr val="1A1A1A"/>
+                </a:solidFill>
+                <a:latin typeface="Calibri"/>
+              </a:rPr>
+              <a:t>•  </a:t>
+            </a:r>
+            <a:r>
+              <a:rPr sz="1700" b="1">
+                <a:solidFill>
+                  <a:srgbClr val="075048"/>
+                </a:solidFill>
+                <a:latin typeface="Calibri"/>
               </a:rPr>
               <a:t>The Encapsulation Tax:</a:t>
             </a:r>
             <a:r>
-              <a:rPr b="0" i="0" sz="2200">
-                <a:solidFill>
-                  <a:srgbClr val="E0EAF6"/>
-                </a:solidFill>
+              <a:rPr sz="1700" b="0">
+                <a:solidFill>
+                  <a:srgbClr val="1A1A1A"/>
+                </a:solidFill>
+                <a:latin typeface="Calibri"/>
               </a:rPr>
               <a:t> Standard CNIs cause a 40–50% bandwidth drop for UDP traffic (9000 MTU) vs. bare-metal networks.</a:t>
             </a:r>
@@ -4775,33 +5619,36 @@
           <a:p>
             <a:pPr algn="l">
               <a:spcBef>
-                <a:spcPts val="600"/>
+                <a:spcPts val="1100"/>
               </a:spcBef>
               <a:spcAft>
                 <a:spcPts val="0"/>
               </a:spcAft>
             </a:pPr>
             <a:r>
-              <a:rPr sz="2000" b="0">
-                <a:solidFill>
-                  <a:srgbClr val="4FC3F7"/>
-                </a:solidFill>
-              </a:rPr>
-              <a:t>▸  </a:t>
-            </a:r>
-            <a:r>
-              <a:rPr b="1" i="0" sz="2200">
-                <a:solidFill>
-                  <a:srgbClr val="FFD166"/>
-                </a:solidFill>
+              <a:rPr sz="1700">
+                <a:solidFill>
+                  <a:srgbClr val="1A1A1A"/>
+                </a:solidFill>
+                <a:latin typeface="Calibri"/>
+              </a:rPr>
+              <a:t>•  </a:t>
+            </a:r>
+            <a:r>
+              <a:rPr sz="1700" b="1">
+                <a:solidFill>
+                  <a:srgbClr val="075048"/>
+                </a:solidFill>
+                <a:latin typeface="Calibri"/>
               </a:rPr>
               <a:t>Legacy Frameworks:</a:t>
             </a:r>
             <a:r>
-              <a:rPr b="0" i="0" sz="2200">
-                <a:solidFill>
-                  <a:srgbClr val="E0EAF6"/>
-                </a:solidFill>
+              <a:rPr sz="1700" b="0">
+                <a:solidFill>
+                  <a:srgbClr val="1A1A1A"/>
+                </a:solidFill>
+                <a:latin typeface="Calibri"/>
               </a:rPr>
               <a:t> Traditional overlays rely on older, sequential Linux kernel frameworks like iptables.</a:t>
             </a:r>
@@ -4809,33 +5656,36 @@
           <a:p>
             <a:pPr algn="l">
               <a:spcBef>
-                <a:spcPts val="600"/>
+                <a:spcPts val="1100"/>
               </a:spcBef>
               <a:spcAft>
                 <a:spcPts val="0"/>
               </a:spcAft>
             </a:pPr>
             <a:r>
-              <a:rPr sz="2000" b="0">
-                <a:solidFill>
-                  <a:srgbClr val="4FC3F7"/>
-                </a:solidFill>
-              </a:rPr>
-              <a:t>▸  </a:t>
-            </a:r>
-            <a:r>
-              <a:rPr b="1" i="0" sz="2200">
-                <a:solidFill>
-                  <a:srgbClr val="FFD166"/>
-                </a:solidFill>
+              <a:rPr sz="1700">
+                <a:solidFill>
+                  <a:srgbClr val="1A1A1A"/>
+                </a:solidFill>
+                <a:latin typeface="Calibri"/>
+              </a:rPr>
+              <a:t>•  </a:t>
+            </a:r>
+            <a:r>
+              <a:rPr sz="1700" b="1">
+                <a:solidFill>
+                  <a:srgbClr val="075048"/>
+                </a:solidFill>
+                <a:latin typeface="Calibri"/>
               </a:rPr>
               <a:t>Edge Inefficiency:</a:t>
             </a:r>
             <a:r>
-              <a:rPr b="0" i="0" sz="2200">
-                <a:solidFill>
-                  <a:srgbClr val="E0EAF6"/>
-                </a:solidFill>
+              <a:rPr sz="1700" b="0">
+                <a:solidFill>
+                  <a:srgbClr val="1A1A1A"/>
+                </a:solidFill>
+                <a:latin typeface="Calibri"/>
               </a:rPr>
               <a:t> Deploying these plugins on constrained hardware yields problematic resource footprints.</a:t>
             </a:r>
@@ -4856,7 +5706,7 @@
     <p:bg>
       <p:bgPr>
         <a:solidFill>
-          <a:srgbClr val="0D1B2A"/>
+          <a:srgbClr val="FFFFFF"/>
         </a:solidFill>
         <a:effectLst/>
       </p:bgPr>
@@ -4876,14 +5726,14 @@
         </p:nvSpPr>
         <p:spPr>
           <a:xfrm>
-            <a:off x="0" y="73152"/>
-            <a:ext cx="12188952" cy="41148"/>
+            <a:off x="0" y="548640"/>
+            <a:ext cx="12188952" cy="10972"/>
           </a:xfrm>
           <a:prstGeom prst="rect">
             <a:avLst/>
           </a:prstGeom>
           <a:solidFill>
-            <a:srgbClr val="4FC3F7"/>
+            <a:srgbClr val="BBBBBB"/>
           </a:solidFill>
           <a:ln>
             <a:noFill/>
@@ -4919,15 +5769,13 @@
         </p:nvSpPr>
         <p:spPr>
           <a:xfrm>
-            <a:off x="10332720" y="137160"/>
-            <a:ext cx="1828800" cy="365760"/>
-          </a:xfrm>
-          <a:prstGeom prst="rect">
-            <a:avLst/>
-          </a:prstGeom>
-          <a:solidFill>
-            <a:srgbClr val="4FC3F7"/>
-          </a:solidFill>
+            <a:off x="164592" y="54864"/>
+            <a:ext cx="4389120" cy="493776"/>
+          </a:xfrm>
+          <a:prstGeom prst="rect">
+            <a:avLst/>
+          </a:prstGeom>
+          <a:noFill/>
         </p:spPr>
         <p:txBody>
           <a:bodyPr wrap="none">
@@ -4935,14 +5783,49 @@
           </a:bodyPr>
           <a:lstStyle/>
           <a:p>
-            <a:pPr algn="ctr"/>
-            <a:r>
-              <a:rPr sz="1100" b="1">
-                <a:solidFill>
-                  <a:srgbClr val="0D1B2A"/>
-                </a:solidFill>
-              </a:rPr>
-              <a:t>SOLUTION</a:t>
+            <a:pPr algn="l"/>
+            <a:r>
+              <a:rPr sz="1700" b="1">
+                <a:solidFill>
+                  <a:srgbClr val="107C6E"/>
+                </a:solidFill>
+                <a:latin typeface="Calibri"/>
+              </a:rPr>
+              <a:t>IIID</a:t>
+            </a:r>
+            <a:r>
+              <a:rPr sz="750">
+                <a:solidFill>
+                  <a:srgbClr val="505050"/>
+                </a:solidFill>
+                <a:latin typeface="Calibri"/>
+              </a:rPr>
+              <a:t>   INDRAPRASTHA INSTITUTE of</a:t>
+            </a:r>
+          </a:p>
+          <a:p>
+            <a:pPr algn="l">
+              <a:spcBef>
+                <a:spcPts val="0"/>
+              </a:spcBef>
+            </a:pPr>
+            <a:r>
+              <a:rPr sz="750">
+                <a:solidFill>
+                  <a:srgbClr val="505050"/>
+                </a:solidFill>
+                <a:latin typeface="Calibri"/>
+              </a:rPr>
+              <a:t>           INFORMATION TECHNOLOGY </a:t>
+            </a:r>
+            <a:r>
+              <a:rPr sz="750" b="1">
+                <a:solidFill>
+                  <a:srgbClr val="107C6E"/>
+                </a:solidFill>
+                <a:latin typeface="Calibri"/>
+              </a:rPr>
+              <a:t>DELHI</a:t>
             </a:r>
           </a:p>
         </p:txBody>
@@ -4955,8 +5838,8 @@
         </p:nvSpPr>
         <p:spPr>
           <a:xfrm>
-            <a:off x="457200" y="182880"/>
-            <a:ext cx="11274552" cy="822960"/>
+            <a:off x="8412480" y="54864"/>
+            <a:ext cx="3657600" cy="493776"/>
           </a:xfrm>
           <a:prstGeom prst="rect">
             <a:avLst/>
@@ -4964,51 +5847,63 @@
           <a:noFill/>
         </p:spPr>
         <p:txBody>
-          <a:bodyPr wrap="square">
+          <a:bodyPr wrap="none">
             <a:spAutoFit/>
           </a:bodyPr>
           <a:lstStyle/>
           <a:p>
-            <a:pPr algn="l"/>
-            <a:r>
-              <a:rPr b="0" i="0" sz="3000">
-                <a:solidFill>
-                  <a:srgbClr val="FFFFFF"/>
-                </a:solidFill>
-              </a:rPr>
-              <a:t>Evaluating </a:t>
-            </a:r>
-            <a:r>
-              <a:rPr b="1" i="0" sz="3000">
-                <a:solidFill>
-                  <a:srgbClr val="FFD166"/>
-                </a:solidFill>
-              </a:rPr>
-              <a:t>Modern Routing</a:t>
-            </a:r>
-            <a:r>
-              <a:rPr b="0" i="0" sz="3000">
-                <a:solidFill>
-                  <a:srgbClr val="FFFFFF"/>
-                </a:solidFill>
-              </a:rPr>
-              <a:t> and </a:t>
-            </a:r>
-            <a:r>
-              <a:rPr b="1" i="0" sz="3000">
-                <a:solidFill>
-                  <a:srgbClr val="FFD166"/>
-                </a:solidFill>
-              </a:rPr>
-              <a:t>eBPF</a:t>
-            </a:r>
-            <a:r>
-              <a:rPr b="0" i="0" sz="3000">
-                <a:solidFill>
-                  <a:srgbClr val="FFFFFF"/>
-                </a:solidFill>
-              </a:rPr>
-              <a:t> Alternatives</a:t>
+            <a:pPr algn="r"/>
+            <a:r>
+              <a:rPr sz="900" b="1">
+                <a:solidFill>
+                  <a:srgbClr val="1A1A1A"/>
+                </a:solidFill>
+                <a:latin typeface="Calibri"/>
+              </a:rPr>
+              <a:t>ECE  |  </a:t>
+            </a:r>
+            <a:r>
+              <a:rPr sz="750">
+                <a:solidFill>
+                  <a:srgbClr val="505050"/>
+                </a:solidFill>
+                <a:latin typeface="Calibri"/>
+              </a:rPr>
+              <a:t>DEPARTMENT OF ELECTRONICS &amp;</a:t>
+            </a:r>
+          </a:p>
+          <a:p>
+            <a:pPr algn="r">
+              <a:spcBef>
+                <a:spcPts val="200"/>
+              </a:spcBef>
+            </a:pPr>
+            <a:r>
+              <a:rPr sz="900" b="1">
+                <a:solidFill>
+                  <a:srgbClr val="107C6E"/>
+                </a:solidFill>
+                <a:latin typeface="Calibri"/>
+              </a:rPr>
+              <a:t>IIID  </a:t>
+            </a:r>
+            <a:r>
+              <a:rPr sz="750">
+                <a:solidFill>
+                  <a:srgbClr val="505050"/>
+                </a:solidFill>
+                <a:latin typeface="Calibri"/>
+              </a:rPr>
+              <a:t>COMMUNICATIONS </a:t>
+            </a:r>
+            <a:r>
+              <a:rPr sz="750" b="1">
+                <a:solidFill>
+                  <a:srgbClr val="107C6E"/>
+                </a:solidFill>
+                <a:latin typeface="Calibri"/>
+              </a:rPr>
+              <a:t>ENGINEERING</a:t>
             </a:r>
           </a:p>
         </p:txBody>
@@ -5020,15 +5915,15 @@
           <p:nvPr/>
         </p:nvSpPr>
         <p:spPr>
-          <a:xfrm>
-            <a:off x="457200" y="1051560"/>
-            <a:ext cx="11274552" cy="7315"/>
+          <a:xfrm rot="18900000">
+            <a:off x="7543800" y="5641848"/>
+            <a:ext cx="5029200" cy="237744"/>
           </a:xfrm>
           <a:prstGeom prst="rect">
             <a:avLst/>
           </a:prstGeom>
           <a:solidFill>
-            <a:srgbClr val="4FC3F7"/>
+            <a:srgbClr val="C4E8E2"/>
           </a:solidFill>
           <a:ln>
             <a:noFill/>
@@ -5058,14 +5953,178 @@
       </p:sp>
       <p:sp>
         <p:nvSpPr>
-          <p:cNvPr id="6" name="TextBox 5"/>
+          <p:cNvPr id="6" name="Rectangle 5"/>
+          <p:cNvSpPr/>
+          <p:nvPr/>
+        </p:nvSpPr>
+        <p:spPr>
+          <a:xfrm rot="18900000">
+            <a:off x="8001000" y="5138928"/>
+            <a:ext cx="5029200" cy="237744"/>
+          </a:xfrm>
+          <a:prstGeom prst="rect">
+            <a:avLst/>
+          </a:prstGeom>
+          <a:solidFill>
+            <a:srgbClr val="C4E8E2"/>
+          </a:solidFill>
+          <a:ln>
+            <a:noFill/>
+          </a:ln>
+        </p:spPr>
+        <p:style>
+          <a:lnRef idx="1">
+            <a:schemeClr val="accent1"/>
+          </a:lnRef>
+          <a:fillRef idx="3">
+            <a:schemeClr val="accent1"/>
+          </a:fillRef>
+          <a:effectRef idx="2">
+            <a:schemeClr val="accent1"/>
+          </a:effectRef>
+          <a:fontRef idx="minor">
+            <a:schemeClr val="lt1"/>
+          </a:fontRef>
+        </p:style>
+        <p:txBody>
+          <a:bodyPr rtlCol="0" anchor="ctr"/>
+          <a:lstStyle/>
+          <a:p>
+            <a:pPr algn="ctr"/>
+          </a:p>
+        </p:txBody>
+      </p:sp>
+      <p:sp>
+        <p:nvSpPr>
+          <p:cNvPr id="7" name="Rectangle 6"/>
+          <p:cNvSpPr/>
+          <p:nvPr/>
+        </p:nvSpPr>
+        <p:spPr>
+          <a:xfrm rot="18900000">
+            <a:off x="8458200" y="4636008"/>
+            <a:ext cx="5029200" cy="237744"/>
+          </a:xfrm>
+          <a:prstGeom prst="rect">
+            <a:avLst/>
+          </a:prstGeom>
+          <a:solidFill>
+            <a:srgbClr val="C4E8E2"/>
+          </a:solidFill>
+          <a:ln>
+            <a:noFill/>
+          </a:ln>
+        </p:spPr>
+        <p:style>
+          <a:lnRef idx="1">
+            <a:schemeClr val="accent1"/>
+          </a:lnRef>
+          <a:fillRef idx="3">
+            <a:schemeClr val="accent1"/>
+          </a:fillRef>
+          <a:effectRef idx="2">
+            <a:schemeClr val="accent1"/>
+          </a:effectRef>
+          <a:fontRef idx="minor">
+            <a:schemeClr val="lt1"/>
+          </a:fontRef>
+        </p:style>
+        <p:txBody>
+          <a:bodyPr rtlCol="0" anchor="ctr"/>
+          <a:lstStyle/>
+          <a:p>
+            <a:pPr algn="ctr"/>
+          </a:p>
+        </p:txBody>
+      </p:sp>
+      <p:sp>
+        <p:nvSpPr>
+          <p:cNvPr id="8" name="Rectangle 7"/>
+          <p:cNvSpPr/>
+          <p:nvPr/>
+        </p:nvSpPr>
+        <p:spPr>
+          <a:xfrm rot="18900000">
+            <a:off x="8915400" y="4133088"/>
+            <a:ext cx="5029200" cy="237744"/>
+          </a:xfrm>
+          <a:prstGeom prst="rect">
+            <a:avLst/>
+          </a:prstGeom>
+          <a:solidFill>
+            <a:srgbClr val="C4E8E2"/>
+          </a:solidFill>
+          <a:ln>
+            <a:noFill/>
+          </a:ln>
+        </p:spPr>
+        <p:style>
+          <a:lnRef idx="1">
+            <a:schemeClr val="accent1"/>
+          </a:lnRef>
+          <a:fillRef idx="3">
+            <a:schemeClr val="accent1"/>
+          </a:fillRef>
+          <a:effectRef idx="2">
+            <a:schemeClr val="accent1"/>
+          </a:effectRef>
+          <a:fontRef idx="minor">
+            <a:schemeClr val="lt1"/>
+          </a:fontRef>
+        </p:style>
+        <p:txBody>
+          <a:bodyPr rtlCol="0" anchor="ctr"/>
+          <a:lstStyle/>
+          <a:p>
+            <a:pPr algn="ctr"/>
+          </a:p>
+        </p:txBody>
+      </p:sp>
+      <p:sp>
+        <p:nvSpPr>
+          <p:cNvPr id="9" name="TextBox 8"/>
           <p:cNvSpPr txBox="1"/>
           <p:nvPr/>
         </p:nvSpPr>
         <p:spPr>
           <a:xfrm>
-            <a:off x="457200" y="1188720"/>
-            <a:ext cx="11274552" cy="5029200"/>
+            <a:off x="11137392" y="6473952"/>
+            <a:ext cx="914400" cy="320040"/>
+          </a:xfrm>
+          <a:prstGeom prst="rect">
+            <a:avLst/>
+          </a:prstGeom>
+          <a:noFill/>
+        </p:spPr>
+        <p:txBody>
+          <a:bodyPr wrap="none">
+            <a:spAutoFit/>
+          </a:bodyPr>
+          <a:lstStyle/>
+          <a:p>
+            <a:pPr algn="r"/>
+            <a:r>
+              <a:rPr sz="1000">
+                <a:solidFill>
+                  <a:srgbClr val="505050"/>
+                </a:solidFill>
+                <a:latin typeface="Calibri"/>
+              </a:rPr>
+              <a:t>4 / 8</a:t>
+            </a:r>
+          </a:p>
+        </p:txBody>
+      </p:sp>
+      <p:sp>
+        <p:nvSpPr>
+          <p:cNvPr id="10" name="TextBox 9"/>
+          <p:cNvSpPr txBox="1"/>
+          <p:nvPr/>
+        </p:nvSpPr>
+        <p:spPr>
+          <a:xfrm>
+            <a:off x="457200" y="685800"/>
+            <a:ext cx="11274552" cy="594360"/>
           </a:xfrm>
           <a:prstGeom prst="rect">
             <a:avLst/>
@@ -5078,35 +6137,125 @@
           </a:bodyPr>
           <a:lstStyle/>
           <a:p>
+            <a:pPr algn="l"/>
+            <a:r>
+              <a:rPr sz="2200" b="1">
+                <a:solidFill>
+                  <a:srgbClr val="107C6E"/>
+                </a:solidFill>
+                <a:latin typeface="Calibri"/>
+              </a:rPr>
+              <a:t>3.  </a:t>
+            </a:r>
+            <a:r>
+              <a:rPr sz="2200" b="1">
+                <a:solidFill>
+                  <a:srgbClr val="107C6E"/>
+                </a:solidFill>
+                <a:latin typeface="Calibri"/>
+              </a:rPr>
+              <a:t>Evaluating Modern Routing and eBPF Alternatives</a:t>
+            </a:r>
+          </a:p>
+        </p:txBody>
+      </p:sp>
+      <p:sp>
+        <p:nvSpPr>
+          <p:cNvPr id="11" name="Rectangle 10"/>
+          <p:cNvSpPr/>
+          <p:nvPr/>
+        </p:nvSpPr>
+        <p:spPr>
+          <a:xfrm>
+            <a:off x="457200" y="1252728"/>
+            <a:ext cx="11274552" cy="22860"/>
+          </a:xfrm>
+          <a:prstGeom prst="rect">
+            <a:avLst/>
+          </a:prstGeom>
+          <a:solidFill>
+            <a:srgbClr val="107C6E"/>
+          </a:solidFill>
+          <a:ln>
+            <a:noFill/>
+          </a:ln>
+        </p:spPr>
+        <p:style>
+          <a:lnRef idx="1">
+            <a:schemeClr val="accent1"/>
+          </a:lnRef>
+          <a:fillRef idx="3">
+            <a:schemeClr val="accent1"/>
+          </a:fillRef>
+          <a:effectRef idx="2">
+            <a:schemeClr val="accent1"/>
+          </a:effectRef>
+          <a:fontRef idx="minor">
+            <a:schemeClr val="lt1"/>
+          </a:fontRef>
+        </p:style>
+        <p:txBody>
+          <a:bodyPr rtlCol="0" anchor="ctr"/>
+          <a:lstStyle/>
+          <a:p>
+            <a:pPr algn="ctr"/>
+          </a:p>
+        </p:txBody>
+      </p:sp>
+      <p:sp>
+        <p:nvSpPr>
+          <p:cNvPr id="12" name="TextBox 11"/>
+          <p:cNvSpPr txBox="1"/>
+          <p:nvPr/>
+        </p:nvSpPr>
+        <p:spPr>
+          <a:xfrm>
+            <a:off x="457200" y="1325880"/>
+            <a:ext cx="11274552" cy="5166360"/>
+          </a:xfrm>
+          <a:prstGeom prst="rect">
+            <a:avLst/>
+          </a:prstGeom>
+          <a:noFill/>
+        </p:spPr>
+        <p:txBody>
+          <a:bodyPr wrap="square">
+            <a:spAutoFit/>
+          </a:bodyPr>
+          <a:lstStyle/>
+          <a:p>
             <a:pPr algn="l">
               <a:spcBef>
-                <a:spcPts val="600"/>
+                <a:spcPts val="1100"/>
               </a:spcBef>
               <a:spcAft>
                 <a:spcPts val="0"/>
               </a:spcAft>
             </a:pPr>
             <a:r>
-              <a:rPr sz="2000" b="0">
-                <a:solidFill>
-                  <a:srgbClr val="4FC3F7"/>
-                </a:solidFill>
-              </a:rPr>
-              <a:t>▸  </a:t>
-            </a:r>
-            <a:r>
-              <a:rPr b="1" i="0" sz="2200">
-                <a:solidFill>
-                  <a:srgbClr val="FFD166"/>
-                </a:solidFill>
+              <a:rPr sz="1700">
+                <a:solidFill>
+                  <a:srgbClr val="1A1A1A"/>
+                </a:solidFill>
+                <a:latin typeface="Calibri"/>
+              </a:rPr>
+              <a:t>•  </a:t>
+            </a:r>
+            <a:r>
+              <a:rPr sz="1700" b="1">
+                <a:solidFill>
+                  <a:srgbClr val="075048"/>
+                </a:solidFill>
+                <a:latin typeface="Calibri"/>
               </a:rPr>
               <a:t>System Tuning:</a:t>
             </a:r>
             <a:r>
-              <a:rPr b="0" i="0" sz="2200">
-                <a:solidFill>
-                  <a:srgbClr val="E0EAF6"/>
-                </a:solidFill>
+              <a:rPr sz="1700" b="0">
+                <a:solidFill>
+                  <a:srgbClr val="1A1A1A"/>
+                </a:solidFill>
+                <a:latin typeface="Calibri"/>
               </a:rPr>
               <a:t> Measuring bandwidth recovery through custom kernel-level TCP/UDP optimizations.</a:t>
             </a:r>
@@ -5114,33 +6263,36 @@
           <a:p>
             <a:pPr algn="l">
               <a:spcBef>
-                <a:spcPts val="600"/>
+                <a:spcPts val="1100"/>
               </a:spcBef>
               <a:spcAft>
                 <a:spcPts val="0"/>
               </a:spcAft>
             </a:pPr>
             <a:r>
-              <a:rPr sz="2000" b="0">
-                <a:solidFill>
-                  <a:srgbClr val="4FC3F7"/>
-                </a:solidFill>
-              </a:rPr>
-              <a:t>▸  </a:t>
-            </a:r>
-            <a:r>
-              <a:rPr b="1" i="0" sz="2200">
-                <a:solidFill>
-                  <a:srgbClr val="FFD166"/>
-                </a:solidFill>
+              <a:rPr sz="1700">
+                <a:solidFill>
+                  <a:srgbClr val="1A1A1A"/>
+                </a:solidFill>
+                <a:latin typeface="Calibri"/>
+              </a:rPr>
+              <a:t>•  </a:t>
+            </a:r>
+            <a:r>
+              <a:rPr sz="1700" b="1">
+                <a:solidFill>
+                  <a:srgbClr val="075048"/>
+                </a:solidFill>
+                <a:latin typeface="Calibri"/>
               </a:rPr>
               <a:t>Edge Distributions:</a:t>
             </a:r>
             <a:r>
-              <a:rPr b="0" i="0" sz="2200">
-                <a:solidFill>
-                  <a:srgbClr val="E0EAF6"/>
-                </a:solidFill>
+              <a:rPr sz="1700" b="0">
+                <a:solidFill>
+                  <a:srgbClr val="1A1A1A"/>
+                </a:solidFill>
+                <a:latin typeface="Calibri"/>
               </a:rPr>
               <a:t> Quantifying RAM/CPU footprints of complex CNIs on lightweight OSs (K3s, MicroK8s).</a:t>
             </a:r>
@@ -5148,33 +6300,36 @@
           <a:p>
             <a:pPr algn="l">
               <a:spcBef>
-                <a:spcPts val="600"/>
+                <a:spcPts val="1100"/>
               </a:spcBef>
               <a:spcAft>
                 <a:spcPts val="0"/>
               </a:spcAft>
             </a:pPr>
             <a:r>
-              <a:rPr sz="2000" b="0">
-                <a:solidFill>
-                  <a:srgbClr val="4FC3F7"/>
-                </a:solidFill>
-              </a:rPr>
-              <a:t>▸  </a:t>
-            </a:r>
-            <a:r>
-              <a:rPr b="1" i="0" sz="2200">
-                <a:solidFill>
-                  <a:srgbClr val="FFD166"/>
-                </a:solidFill>
+              <a:rPr sz="1700">
+                <a:solidFill>
+                  <a:srgbClr val="1A1A1A"/>
+                </a:solidFill>
+                <a:latin typeface="Calibri"/>
+              </a:rPr>
+              <a:t>•  </a:t>
+            </a:r>
+            <a:r>
+              <a:rPr sz="1700" b="1">
+                <a:solidFill>
+                  <a:srgbClr val="075048"/>
+                </a:solidFill>
+                <a:latin typeface="Calibri"/>
               </a:rPr>
               <a:t>eBPF Data Planes:</a:t>
             </a:r>
             <a:r>
-              <a:rPr b="0" i="0" sz="2200">
-                <a:solidFill>
-                  <a:srgbClr val="E0EAF6"/>
-                </a:solidFill>
+              <a:rPr sz="1700" b="0">
+                <a:solidFill>
+                  <a:srgbClr val="1A1A1A"/>
+                </a:solidFill>
+                <a:latin typeface="Calibri"/>
               </a:rPr>
               <a:t> Analyzing technologies (like Cilium) that bypass kube-proxy by running programs directly in the kernel.</a:t>
             </a:r>
@@ -5195,7 +6350,7 @@
     <p:bg>
       <p:bgPr>
         <a:solidFill>
-          <a:srgbClr val="0D1B2A"/>
+          <a:srgbClr val="FFFFFF"/>
         </a:solidFill>
         <a:effectLst/>
       </p:bgPr>
@@ -5215,14 +6370,14 @@
         </p:nvSpPr>
         <p:spPr>
           <a:xfrm>
-            <a:off x="0" y="73152"/>
-            <a:ext cx="12188952" cy="41148"/>
+            <a:off x="0" y="548640"/>
+            <a:ext cx="12188952" cy="10972"/>
           </a:xfrm>
           <a:prstGeom prst="rect">
             <a:avLst/>
           </a:prstGeom>
           <a:solidFill>
-            <a:srgbClr val="4FC3F7"/>
+            <a:srgbClr val="BBBBBB"/>
           </a:solidFill>
           <a:ln>
             <a:noFill/>
@@ -5258,15 +6413,13 @@
         </p:nvSpPr>
         <p:spPr>
           <a:xfrm>
-            <a:off x="9966960" y="137160"/>
-            <a:ext cx="1828800" cy="365760"/>
-          </a:xfrm>
-          <a:prstGeom prst="rect">
-            <a:avLst/>
-          </a:prstGeom>
-          <a:solidFill>
-            <a:srgbClr val="4FC3F7"/>
-          </a:solidFill>
+            <a:off x="164592" y="54864"/>
+            <a:ext cx="4389120" cy="493776"/>
+          </a:xfrm>
+          <a:prstGeom prst="rect">
+            <a:avLst/>
+          </a:prstGeom>
+          <a:noFill/>
         </p:spPr>
         <p:txBody>
           <a:bodyPr wrap="none">
@@ -5274,14 +6427,49 @@
           </a:bodyPr>
           <a:lstStyle/>
           <a:p>
-            <a:pPr algn="ctr"/>
-            <a:r>
-              <a:rPr sz="1100" b="1">
-                <a:solidFill>
-                  <a:srgbClr val="0D1B2A"/>
-                </a:solidFill>
-              </a:rPr>
-              <a:t>RESULTS 1/3</a:t>
+            <a:pPr algn="l"/>
+            <a:r>
+              <a:rPr sz="1700" b="1">
+                <a:solidFill>
+                  <a:srgbClr val="107C6E"/>
+                </a:solidFill>
+                <a:latin typeface="Calibri"/>
+              </a:rPr>
+              <a:t>IIID</a:t>
+            </a:r>
+            <a:r>
+              <a:rPr sz="750">
+                <a:solidFill>
+                  <a:srgbClr val="505050"/>
+                </a:solidFill>
+                <a:latin typeface="Calibri"/>
+              </a:rPr>
+              <a:t>   INDRAPRASTHA INSTITUTE of</a:t>
+            </a:r>
+          </a:p>
+          <a:p>
+            <a:pPr algn="l">
+              <a:spcBef>
+                <a:spcPts val="0"/>
+              </a:spcBef>
+            </a:pPr>
+            <a:r>
+              <a:rPr sz="750">
+                <a:solidFill>
+                  <a:srgbClr val="505050"/>
+                </a:solidFill>
+                <a:latin typeface="Calibri"/>
+              </a:rPr>
+              <a:t>           INFORMATION TECHNOLOGY </a:t>
+            </a:r>
+            <a:r>
+              <a:rPr sz="750" b="1">
+                <a:solidFill>
+                  <a:srgbClr val="107C6E"/>
+                </a:solidFill>
+                <a:latin typeface="Calibri"/>
+              </a:rPr>
+              <a:t>DELHI</a:t>
             </a:r>
           </a:p>
         </p:txBody>
@@ -5294,8 +6482,8 @@
         </p:nvSpPr>
         <p:spPr>
           <a:xfrm>
-            <a:off x="457200" y="182880"/>
-            <a:ext cx="11274552" cy="822960"/>
+            <a:off x="8412480" y="54864"/>
+            <a:ext cx="3657600" cy="493776"/>
           </a:xfrm>
           <a:prstGeom prst="rect">
             <a:avLst/>
@@ -5303,43 +6491,63 @@
           <a:noFill/>
         </p:spPr>
         <p:txBody>
-          <a:bodyPr wrap="square">
+          <a:bodyPr wrap="none">
             <a:spAutoFit/>
           </a:bodyPr>
           <a:lstStyle/>
           <a:p>
-            <a:pPr algn="l"/>
-            <a:r>
-              <a:rPr b="1" i="0" sz="2800">
-                <a:solidFill>
-                  <a:srgbClr val="FFD166"/>
-                </a:solidFill>
-              </a:rPr>
-              <a:t>Calico</a:t>
-            </a:r>
-            <a:r>
-              <a:rPr b="0" i="0" sz="2800">
-                <a:solidFill>
-                  <a:srgbClr val="FFFFFF"/>
-                </a:solidFill>
-              </a:rPr>
-              <a:t> Thrives on Tuning, </a:t>
-            </a:r>
-            <a:r>
-              <a:rPr b="1" i="0" sz="2800">
-                <a:solidFill>
-                  <a:srgbClr val="FFD166"/>
-                </a:solidFill>
-              </a:rPr>
-              <a:t>Flannel</a:t>
-            </a:r>
-            <a:r>
-              <a:rPr b="0" i="0" sz="2800">
-                <a:solidFill>
-                  <a:srgbClr val="FFFFFF"/>
-                </a:solidFill>
-              </a:rPr>
-              <a:t> Wins on Latency</a:t>
+            <a:pPr algn="r"/>
+            <a:r>
+              <a:rPr sz="900" b="1">
+                <a:solidFill>
+                  <a:srgbClr val="1A1A1A"/>
+                </a:solidFill>
+                <a:latin typeface="Calibri"/>
+              </a:rPr>
+              <a:t>ECE  |  </a:t>
+            </a:r>
+            <a:r>
+              <a:rPr sz="750">
+                <a:solidFill>
+                  <a:srgbClr val="505050"/>
+                </a:solidFill>
+                <a:latin typeface="Calibri"/>
+              </a:rPr>
+              <a:t>DEPARTMENT OF ELECTRONICS &amp;</a:t>
+            </a:r>
+          </a:p>
+          <a:p>
+            <a:pPr algn="r">
+              <a:spcBef>
+                <a:spcPts val="200"/>
+              </a:spcBef>
+            </a:pPr>
+            <a:r>
+              <a:rPr sz="900" b="1">
+                <a:solidFill>
+                  <a:srgbClr val="107C6E"/>
+                </a:solidFill>
+                <a:latin typeface="Calibri"/>
+              </a:rPr>
+              <a:t>IIID  </a:t>
+            </a:r>
+            <a:r>
+              <a:rPr sz="750">
+                <a:solidFill>
+                  <a:srgbClr val="505050"/>
+                </a:solidFill>
+                <a:latin typeface="Calibri"/>
+              </a:rPr>
+              <a:t>COMMUNICATIONS </a:t>
+            </a:r>
+            <a:r>
+              <a:rPr sz="750" b="1">
+                <a:solidFill>
+                  <a:srgbClr val="107C6E"/>
+                </a:solidFill>
+                <a:latin typeface="Calibri"/>
+              </a:rPr>
+              <a:t>ENGINEERING</a:t>
             </a:r>
           </a:p>
         </p:txBody>
@@ -5351,15 +6559,15 @@
           <p:nvPr/>
         </p:nvSpPr>
         <p:spPr>
-          <a:xfrm>
-            <a:off x="457200" y="1051560"/>
-            <a:ext cx="11274552" cy="7315"/>
+          <a:xfrm rot="18900000">
+            <a:off x="7543800" y="5641848"/>
+            <a:ext cx="5029200" cy="237744"/>
           </a:xfrm>
           <a:prstGeom prst="rect">
             <a:avLst/>
           </a:prstGeom>
           <a:solidFill>
-            <a:srgbClr val="4FC3F7"/>
+            <a:srgbClr val="C4E8E2"/>
           </a:solidFill>
           <a:ln>
             <a:noFill/>
@@ -5387,9 +6595,260 @@
           </a:p>
         </p:txBody>
       </p:sp>
+      <p:sp>
+        <p:nvSpPr>
+          <p:cNvPr id="6" name="Rectangle 5"/>
+          <p:cNvSpPr/>
+          <p:nvPr/>
+        </p:nvSpPr>
+        <p:spPr>
+          <a:xfrm rot="18900000">
+            <a:off x="8001000" y="5138928"/>
+            <a:ext cx="5029200" cy="237744"/>
+          </a:xfrm>
+          <a:prstGeom prst="rect">
+            <a:avLst/>
+          </a:prstGeom>
+          <a:solidFill>
+            <a:srgbClr val="C4E8E2"/>
+          </a:solidFill>
+          <a:ln>
+            <a:noFill/>
+          </a:ln>
+        </p:spPr>
+        <p:style>
+          <a:lnRef idx="1">
+            <a:schemeClr val="accent1"/>
+          </a:lnRef>
+          <a:fillRef idx="3">
+            <a:schemeClr val="accent1"/>
+          </a:fillRef>
+          <a:effectRef idx="2">
+            <a:schemeClr val="accent1"/>
+          </a:effectRef>
+          <a:fontRef idx="minor">
+            <a:schemeClr val="lt1"/>
+          </a:fontRef>
+        </p:style>
+        <p:txBody>
+          <a:bodyPr rtlCol="0" anchor="ctr"/>
+          <a:lstStyle/>
+          <a:p>
+            <a:pPr algn="ctr"/>
+          </a:p>
+        </p:txBody>
+      </p:sp>
+      <p:sp>
+        <p:nvSpPr>
+          <p:cNvPr id="7" name="Rectangle 6"/>
+          <p:cNvSpPr/>
+          <p:nvPr/>
+        </p:nvSpPr>
+        <p:spPr>
+          <a:xfrm rot="18900000">
+            <a:off x="8458200" y="4636008"/>
+            <a:ext cx="5029200" cy="237744"/>
+          </a:xfrm>
+          <a:prstGeom prst="rect">
+            <a:avLst/>
+          </a:prstGeom>
+          <a:solidFill>
+            <a:srgbClr val="C4E8E2"/>
+          </a:solidFill>
+          <a:ln>
+            <a:noFill/>
+          </a:ln>
+        </p:spPr>
+        <p:style>
+          <a:lnRef idx="1">
+            <a:schemeClr val="accent1"/>
+          </a:lnRef>
+          <a:fillRef idx="3">
+            <a:schemeClr val="accent1"/>
+          </a:fillRef>
+          <a:effectRef idx="2">
+            <a:schemeClr val="accent1"/>
+          </a:effectRef>
+          <a:fontRef idx="minor">
+            <a:schemeClr val="lt1"/>
+          </a:fontRef>
+        </p:style>
+        <p:txBody>
+          <a:bodyPr rtlCol="0" anchor="ctr"/>
+          <a:lstStyle/>
+          <a:p>
+            <a:pPr algn="ctr"/>
+          </a:p>
+        </p:txBody>
+      </p:sp>
+      <p:sp>
+        <p:nvSpPr>
+          <p:cNvPr id="8" name="Rectangle 7"/>
+          <p:cNvSpPr/>
+          <p:nvPr/>
+        </p:nvSpPr>
+        <p:spPr>
+          <a:xfrm rot="18900000">
+            <a:off x="8915400" y="4133088"/>
+            <a:ext cx="5029200" cy="237744"/>
+          </a:xfrm>
+          <a:prstGeom prst="rect">
+            <a:avLst/>
+          </a:prstGeom>
+          <a:solidFill>
+            <a:srgbClr val="C4E8E2"/>
+          </a:solidFill>
+          <a:ln>
+            <a:noFill/>
+          </a:ln>
+        </p:spPr>
+        <p:style>
+          <a:lnRef idx="1">
+            <a:schemeClr val="accent1"/>
+          </a:lnRef>
+          <a:fillRef idx="3">
+            <a:schemeClr val="accent1"/>
+          </a:fillRef>
+          <a:effectRef idx="2">
+            <a:schemeClr val="accent1"/>
+          </a:effectRef>
+          <a:fontRef idx="minor">
+            <a:schemeClr val="lt1"/>
+          </a:fontRef>
+        </p:style>
+        <p:txBody>
+          <a:bodyPr rtlCol="0" anchor="ctr"/>
+          <a:lstStyle/>
+          <a:p>
+            <a:pPr algn="ctr"/>
+          </a:p>
+        </p:txBody>
+      </p:sp>
+      <p:sp>
+        <p:nvSpPr>
+          <p:cNvPr id="9" name="TextBox 8"/>
+          <p:cNvSpPr txBox="1"/>
+          <p:nvPr/>
+        </p:nvSpPr>
+        <p:spPr>
+          <a:xfrm>
+            <a:off x="11137392" y="6473952"/>
+            <a:ext cx="914400" cy="320040"/>
+          </a:xfrm>
+          <a:prstGeom prst="rect">
+            <a:avLst/>
+          </a:prstGeom>
+          <a:noFill/>
+        </p:spPr>
+        <p:txBody>
+          <a:bodyPr wrap="none">
+            <a:spAutoFit/>
+          </a:bodyPr>
+          <a:lstStyle/>
+          <a:p>
+            <a:pPr algn="r"/>
+            <a:r>
+              <a:rPr sz="1000">
+                <a:solidFill>
+                  <a:srgbClr val="505050"/>
+                </a:solidFill>
+                <a:latin typeface="Calibri"/>
+              </a:rPr>
+              <a:t>5 / 8</a:t>
+            </a:r>
+          </a:p>
+        </p:txBody>
+      </p:sp>
+      <p:sp>
+        <p:nvSpPr>
+          <p:cNvPr id="10" name="TextBox 9"/>
+          <p:cNvSpPr txBox="1"/>
+          <p:nvPr/>
+        </p:nvSpPr>
+        <p:spPr>
+          <a:xfrm>
+            <a:off x="457200" y="685800"/>
+            <a:ext cx="11274552" cy="594360"/>
+          </a:xfrm>
+          <a:prstGeom prst="rect">
+            <a:avLst/>
+          </a:prstGeom>
+          <a:noFill/>
+        </p:spPr>
+        <p:txBody>
+          <a:bodyPr wrap="square">
+            <a:spAutoFit/>
+          </a:bodyPr>
+          <a:lstStyle/>
+          <a:p>
+            <a:pPr algn="l"/>
+            <a:r>
+              <a:rPr sz="2200" b="1">
+                <a:solidFill>
+                  <a:srgbClr val="107C6E"/>
+                </a:solidFill>
+                <a:latin typeface="Calibri"/>
+              </a:rPr>
+              <a:t>4.  </a:t>
+            </a:r>
+            <a:r>
+              <a:rPr sz="2200" b="1">
+                <a:solidFill>
+                  <a:srgbClr val="107C6E"/>
+                </a:solidFill>
+                <a:latin typeface="Calibri"/>
+              </a:rPr>
+              <a:t>Calico Thrives on Tuning, Flannel Wins on Latency</a:t>
+            </a:r>
+          </a:p>
+        </p:txBody>
+      </p:sp>
+      <p:sp>
+        <p:nvSpPr>
+          <p:cNvPr id="11" name="Rectangle 10"/>
+          <p:cNvSpPr/>
+          <p:nvPr/>
+        </p:nvSpPr>
+        <p:spPr>
+          <a:xfrm>
+            <a:off x="457200" y="1252728"/>
+            <a:ext cx="11274552" cy="22860"/>
+          </a:xfrm>
+          <a:prstGeom prst="rect">
+            <a:avLst/>
+          </a:prstGeom>
+          <a:solidFill>
+            <a:srgbClr val="107C6E"/>
+          </a:solidFill>
+          <a:ln>
+            <a:noFill/>
+          </a:ln>
+        </p:spPr>
+        <p:style>
+          <a:lnRef idx="1">
+            <a:schemeClr val="accent1"/>
+          </a:lnRef>
+          <a:fillRef idx="3">
+            <a:schemeClr val="accent1"/>
+          </a:fillRef>
+          <a:effectRef idx="2">
+            <a:schemeClr val="accent1"/>
+          </a:effectRef>
+          <a:fontRef idx="minor">
+            <a:schemeClr val="lt1"/>
+          </a:fontRef>
+        </p:style>
+        <p:txBody>
+          <a:bodyPr rtlCol="0" anchor="ctr"/>
+          <a:lstStyle/>
+          <a:p>
+            <a:pPr algn="ctr"/>
+          </a:p>
+        </p:txBody>
+      </p:sp>
       <p:pic>
         <p:nvPicPr>
-          <p:cNvPr id="6" name="Picture 5" descr="bandwidth_chart.png"/>
+          <p:cNvPr id="12" name="Picture 11" descr="bandwidth_chart.png"/>
           <p:cNvPicPr>
             <a:picLocks noChangeAspect="1"/>
           </p:cNvPicPr>
@@ -5403,8 +6862,8 @@
         </p:blipFill>
         <p:spPr>
           <a:xfrm>
-            <a:off x="365760" y="1143000"/>
-            <a:ext cx="6675120" cy="5120640"/>
+            <a:off x="365760" y="1325880"/>
+            <a:ext cx="6583680" cy="4937760"/>
           </a:xfrm>
           <a:prstGeom prst="rect">
             <a:avLst/>
@@ -5413,14 +6872,49 @@
       </p:pic>
       <p:sp>
         <p:nvSpPr>
-          <p:cNvPr id="7" name="TextBox 6"/>
+          <p:cNvPr id="13" name="TextBox 12"/>
           <p:cNvSpPr txBox="1"/>
           <p:nvPr/>
         </p:nvSpPr>
         <p:spPr>
           <a:xfrm>
-            <a:off x="7315200" y="1188720"/>
-            <a:ext cx="4480560" cy="5029200"/>
+            <a:off x="365760" y="6300216"/>
+            <a:ext cx="6583680" cy="274320"/>
+          </a:xfrm>
+          <a:prstGeom prst="rect">
+            <a:avLst/>
+          </a:prstGeom>
+          <a:noFill/>
+        </p:spPr>
+        <p:txBody>
+          <a:bodyPr wrap="none">
+            <a:spAutoFit/>
+          </a:bodyPr>
+          <a:lstStyle/>
+          <a:p>
+            <a:pPr algn="ctr"/>
+            <a:r>
+              <a:rPr sz="950" i="1">
+                <a:solidFill>
+                  <a:srgbClr val="505050"/>
+                </a:solidFill>
+                <a:latin typeface="Calibri"/>
+              </a:rPr>
+              <a:t>Fig. 1 – TCP Bandwidth Efficiency Comparison across CNI Plugins</a:t>
+            </a:r>
+          </a:p>
+        </p:txBody>
+      </p:sp>
+      <p:sp>
+        <p:nvSpPr>
+          <p:cNvPr id="14" name="TextBox 13"/>
+          <p:cNvSpPr txBox="1"/>
+          <p:nvPr/>
+        </p:nvSpPr>
+        <p:spPr>
+          <a:xfrm>
+            <a:off x="7223760" y="1325880"/>
+            <a:ext cx="4572000" cy="5166360"/>
           </a:xfrm>
           <a:prstGeom prst="rect">
             <a:avLst/>
@@ -5435,119 +6929,103 @@
           <a:p>
             <a:pPr algn="l">
               <a:spcBef>
-                <a:spcPts val="600"/>
+                <a:spcPts val="400"/>
               </a:spcBef>
-              <a:spcAft>
-                <a:spcPts val="0"/>
-              </a:spcAft>
             </a:pPr>
             <a:r>
-              <a:rPr sz="1600" b="0">
-                <a:solidFill>
-                  <a:srgbClr val="4FC3F7"/>
-                </a:solidFill>
-              </a:rPr>
-              <a:t>▸  </a:t>
-            </a:r>
-            <a:r>
-              <a:rPr b="1" i="0" sz="1800">
-                <a:solidFill>
-                  <a:srgbClr val="FFD166"/>
-                </a:solidFill>
-              </a:rPr>
-              <a:t>Throughput:</a:t>
-            </a:r>
-            <a:r>
-              <a:rPr b="0" i="0" sz="1800">
-                <a:solidFill>
-                  <a:srgbClr val="E0EAF6"/>
-                </a:solidFill>
-              </a:rPr>
-              <a:t> Kernel optimizations allow direct-routing CNIs (Calico) to recover ~2 Gbit/s of bandwidth.</a:t>
+              <a:rPr sz="1500" b="1">
+                <a:solidFill>
+                  <a:srgbClr val="107C6E"/>
+                </a:solidFill>
+                <a:latin typeface="Calibri"/>
+              </a:rPr>
+              <a:t>Inferences:</a:t>
             </a:r>
           </a:p>
           <a:p>
             <a:pPr algn="l">
               <a:spcBef>
-                <a:spcPts val="600"/>
+                <a:spcPts val="700"/>
               </a:spcBef>
-              <a:spcAft>
-                <a:spcPts val="0"/>
-              </a:spcAft>
             </a:pPr>
             <a:r>
-              <a:rPr sz="1600" b="0">
-                <a:solidFill>
-                  <a:srgbClr val="4FC3F7"/>
-                </a:solidFill>
-              </a:rPr>
-              <a:t>▸  </a:t>
-            </a:r>
-            <a:r>
-              <a:rPr b="1" i="0" sz="1800">
-                <a:solidFill>
-                  <a:srgbClr val="FFD166"/>
-                </a:solidFill>
+              <a:rPr sz="1500">
+                <a:solidFill>
+                  <a:srgbClr val="1A1A1A"/>
+                </a:solidFill>
+                <a:latin typeface="Calibri"/>
+              </a:rPr>
+              <a:t>•  </a:t>
+            </a:r>
+            <a:r>
+              <a:rPr sz="1500" b="1">
+                <a:solidFill>
+                  <a:srgbClr val="075048"/>
+                </a:solidFill>
+                <a:latin typeface="Calibri"/>
+              </a:rPr>
+              <a:t>Throughput:</a:t>
+            </a:r>
+            <a:r>
+              <a:rPr sz="1500" b="0">
+                <a:solidFill>
+                  <a:srgbClr val="1A1A1A"/>
+                </a:solidFill>
+                <a:latin typeface="Calibri"/>
+              </a:rPr>
+              <a:t> Kernel optimizations allow direct-routing CNIs (Calico) to recover ~2 Gbit/s of bandwidth.</a:t>
+            </a:r>
+          </a:p>
+          <a:p>
+            <a:pPr algn="l">
+              <a:spcBef>
+                <a:spcPts val="700"/>
+              </a:spcBef>
+            </a:pPr>
+            <a:r>
+              <a:rPr sz="1500">
+                <a:solidFill>
+                  <a:srgbClr val="1A1A1A"/>
+                </a:solidFill>
+                <a:latin typeface="Calibri"/>
+              </a:rPr>
+              <a:t>•  </a:t>
+            </a:r>
+            <a:r>
+              <a:rPr sz="1500" b="1">
+                <a:solidFill>
+                  <a:srgbClr val="075048"/>
+                </a:solidFill>
+                <a:latin typeface="Calibri"/>
               </a:rPr>
               <a:t>Latency:</a:t>
             </a:r>
             <a:r>
-              <a:rPr b="0" i="0" sz="1800">
-                <a:solidFill>
-                  <a:srgbClr val="E0EAF6"/>
-                </a:solidFill>
+              <a:rPr sz="1500" b="0">
+                <a:solidFill>
+                  <a:srgbClr val="1A1A1A"/>
+                </a:solidFill>
+                <a:latin typeface="Calibri"/>
               </a:rPr>
               <a:t> Flannel exhibits the </a:t>
             </a:r>
             <a:r>
-              <a:rPr b="1" i="0" sz="1800">
-                <a:solidFill>
-                  <a:srgbClr val="FFD166"/>
-                </a:solidFill>
+              <a:rPr sz="1500" b="1">
+                <a:solidFill>
+                  <a:srgbClr val="075048"/>
+                </a:solidFill>
+                <a:latin typeface="Calibri"/>
               </a:rPr>
               <a:t>lowest latency overhead</a:t>
             </a:r>
             <a:r>
-              <a:rPr b="0" i="0" sz="1800">
-                <a:solidFill>
-                  <a:srgbClr val="E0EAF6"/>
-                </a:solidFill>
+              <a:rPr sz="1500" b="0">
+                <a:solidFill>
+                  <a:srgbClr val="1A1A1A"/>
+                </a:solidFill>
+                <a:latin typeface="Calibri"/>
               </a:rPr>
               <a:t> (20% faster than peers), despite using VXLAN encapsulation.</a:t>
-            </a:r>
-          </a:p>
-        </p:txBody>
-      </p:sp>
-      <p:sp>
-        <p:nvSpPr>
-          <p:cNvPr id="8" name="TextBox 7"/>
-          <p:cNvSpPr txBox="1"/>
-          <p:nvPr/>
-        </p:nvSpPr>
-        <p:spPr>
-          <a:xfrm>
-            <a:off x="365760" y="6309360"/>
-            <a:ext cx="6675120" cy="274320"/>
-          </a:xfrm>
-          <a:prstGeom prst="rect">
-            <a:avLst/>
-          </a:prstGeom>
-          <a:noFill/>
-        </p:spPr>
-        <p:txBody>
-          <a:bodyPr wrap="none">
-            <a:spAutoFit/>
-          </a:bodyPr>
-          <a:lstStyle/>
-          <a:p>
-            <a:pPr algn="ctr"/>
-            <a:r>
-              <a:rPr sz="1000" i="1">
-                <a:solidFill>
-                  <a:srgbClr val="ADC8E6"/>
-                </a:solidFill>
-              </a:rPr>
-              <a:t>Fig. 1 – TCP Bandwidth Efficiency Comparison across CNI Plugins</a:t>
             </a:r>
           </a:p>
         </p:txBody>
@@ -5566,7 +7044,7 @@
     <p:bg>
       <p:bgPr>
         <a:solidFill>
-          <a:srgbClr val="0D1B2A"/>
+          <a:srgbClr val="FFFFFF"/>
         </a:solidFill>
         <a:effectLst/>
       </p:bgPr>
@@ -5586,14 +7064,14 @@
         </p:nvSpPr>
         <p:spPr>
           <a:xfrm>
-            <a:off x="0" y="73152"/>
-            <a:ext cx="12188952" cy="41148"/>
+            <a:off x="0" y="548640"/>
+            <a:ext cx="12188952" cy="10972"/>
           </a:xfrm>
           <a:prstGeom prst="rect">
             <a:avLst/>
           </a:prstGeom>
           <a:solidFill>
-            <a:srgbClr val="4FC3F7"/>
+            <a:srgbClr val="BBBBBB"/>
           </a:solidFill>
           <a:ln>
             <a:noFill/>
@@ -5629,15 +7107,13 @@
         </p:nvSpPr>
         <p:spPr>
           <a:xfrm>
-            <a:off x="9966960" y="137160"/>
-            <a:ext cx="1828800" cy="365760"/>
-          </a:xfrm>
-          <a:prstGeom prst="rect">
-            <a:avLst/>
-          </a:prstGeom>
-          <a:solidFill>
-            <a:srgbClr val="4FC3F7"/>
-          </a:solidFill>
+            <a:off x="164592" y="54864"/>
+            <a:ext cx="4389120" cy="493776"/>
+          </a:xfrm>
+          <a:prstGeom prst="rect">
+            <a:avLst/>
+          </a:prstGeom>
+          <a:noFill/>
         </p:spPr>
         <p:txBody>
           <a:bodyPr wrap="none">
@@ -5645,84 +7121,69 @@
           </a:bodyPr>
           <a:lstStyle/>
           <a:p>
-            <a:pPr algn="ctr"/>
-            <a:r>
-              <a:rPr sz="1100" b="1">
-                <a:solidFill>
-                  <a:srgbClr val="0D1B2A"/>
-                </a:solidFill>
-              </a:rPr>
-              <a:t>RESULTS 2/3</a:t>
-            </a:r>
-          </a:p>
-        </p:txBody>
-      </p:sp>
-      <p:sp>
-        <p:nvSpPr>
-          <p:cNvPr id="4" name="TextBox 3"/>
-          <p:cNvSpPr txBox="1"/>
-          <p:nvPr/>
-        </p:nvSpPr>
-        <p:spPr>
-          <a:xfrm>
-            <a:off x="457200" y="182880"/>
-            <a:ext cx="11274552" cy="822960"/>
-          </a:xfrm>
-          <a:prstGeom prst="rect">
-            <a:avLst/>
-          </a:prstGeom>
-          <a:noFill/>
-        </p:spPr>
-        <p:txBody>
-          <a:bodyPr wrap="square">
-            <a:spAutoFit/>
-          </a:bodyPr>
-          <a:lstStyle/>
-          <a:p>
             <a:pPr algn="l"/>
             <a:r>
-              <a:rPr b="0" i="0" sz="2800">
-                <a:solidFill>
-                  <a:srgbClr val="FFFFFF"/>
-                </a:solidFill>
-              </a:rPr>
-              <a:t>Lightweight OS Does </a:t>
-            </a:r>
-            <a:r>
-              <a:rPr b="1" i="0" sz="2800">
-                <a:solidFill>
-                  <a:srgbClr val="FFD166"/>
-                </a:solidFill>
-              </a:rPr>
-              <a:t>Not</a:t>
-            </a:r>
-            <a:r>
-              <a:rPr b="0" i="0" sz="2800">
-                <a:solidFill>
-                  <a:srgbClr val="FFFFFF"/>
-                </a:solidFill>
-              </a:rPr>
-              <a:t> Mean Lightweight CNI</a:t>
-            </a:r>
-          </a:p>
-        </p:txBody>
-      </p:sp>
-      <p:sp>
-        <p:nvSpPr>
-          <p:cNvPr id="5" name="Rectangle 4"/>
+              <a:rPr sz="1700" b="1">
+                <a:solidFill>
+                  <a:srgbClr val="107C6E"/>
+                </a:solidFill>
+                <a:latin typeface="Calibri"/>
+              </a:rPr>
+              <a:t>IIID</a:t>
+            </a:r>
+            <a:r>
+              <a:rPr sz="750">
+                <a:solidFill>
+                  <a:srgbClr val="505050"/>
+                </a:solidFill>
+                <a:latin typeface="Calibri"/>
+              </a:rPr>
+              <a:t>   INDRAPRASTHA INSTITUTE of</a:t>
+            </a:r>
+          </a:p>
+          <a:p>
+            <a:pPr algn="l">
+              <a:spcBef>
+                <a:spcPts val="0"/>
+              </a:spcBef>
+            </a:pPr>
+            <a:r>
+              <a:rPr sz="750">
+                <a:solidFill>
+                  <a:srgbClr val="505050"/>
+                </a:solidFill>
+                <a:latin typeface="Calibri"/>
+              </a:rPr>
+              <a:t>           INFORMATION TECHNOLOGY </a:t>
+            </a:r>
+            <a:r>
+              <a:rPr sz="750" b="1">
+                <a:solidFill>
+                  <a:srgbClr val="107C6E"/>
+                </a:solidFill>
+                <a:latin typeface="Calibri"/>
+              </a:rPr>
+              <a:t>DELHI</a:t>
+            </a:r>
+          </a:p>
+        </p:txBody>
+      </p:sp>
+      <p:sp>
+        <p:nvSpPr>
+          <p:cNvPr id="4" name="Rectangle 3"/>
           <p:cNvSpPr/>
           <p:nvPr/>
         </p:nvSpPr>
         <p:spPr>
-          <a:xfrm>
-            <a:off x="457200" y="1051560"/>
-            <a:ext cx="11274552" cy="7315"/>
+          <a:xfrm rot="18900000">
+            <a:off x="7543800" y="5641848"/>
+            <a:ext cx="5029200" cy="237744"/>
           </a:xfrm>
           <a:prstGeom prst="rect">
             <a:avLst/>
           </a:prstGeom>
           <a:solidFill>
-            <a:srgbClr val="4FC3F7"/>
+            <a:srgbClr val="C4E8E2"/>
           </a:solidFill>
           <a:ln>
             <a:noFill/>
@@ -5750,9 +7211,260 @@
           </a:p>
         </p:txBody>
       </p:sp>
+      <p:sp>
+        <p:nvSpPr>
+          <p:cNvPr id="5" name="Rectangle 4"/>
+          <p:cNvSpPr/>
+          <p:nvPr/>
+        </p:nvSpPr>
+        <p:spPr>
+          <a:xfrm rot="18900000">
+            <a:off x="8001000" y="5138928"/>
+            <a:ext cx="5029200" cy="237744"/>
+          </a:xfrm>
+          <a:prstGeom prst="rect">
+            <a:avLst/>
+          </a:prstGeom>
+          <a:solidFill>
+            <a:srgbClr val="C4E8E2"/>
+          </a:solidFill>
+          <a:ln>
+            <a:noFill/>
+          </a:ln>
+        </p:spPr>
+        <p:style>
+          <a:lnRef idx="1">
+            <a:schemeClr val="accent1"/>
+          </a:lnRef>
+          <a:fillRef idx="3">
+            <a:schemeClr val="accent1"/>
+          </a:fillRef>
+          <a:effectRef idx="2">
+            <a:schemeClr val="accent1"/>
+          </a:effectRef>
+          <a:fontRef idx="minor">
+            <a:schemeClr val="lt1"/>
+          </a:fontRef>
+        </p:style>
+        <p:txBody>
+          <a:bodyPr rtlCol="0" anchor="ctr"/>
+          <a:lstStyle/>
+          <a:p>
+            <a:pPr algn="ctr"/>
+          </a:p>
+        </p:txBody>
+      </p:sp>
+      <p:sp>
+        <p:nvSpPr>
+          <p:cNvPr id="6" name="Rectangle 5"/>
+          <p:cNvSpPr/>
+          <p:nvPr/>
+        </p:nvSpPr>
+        <p:spPr>
+          <a:xfrm rot="18900000">
+            <a:off x="8458200" y="4636008"/>
+            <a:ext cx="5029200" cy="237744"/>
+          </a:xfrm>
+          <a:prstGeom prst="rect">
+            <a:avLst/>
+          </a:prstGeom>
+          <a:solidFill>
+            <a:srgbClr val="C4E8E2"/>
+          </a:solidFill>
+          <a:ln>
+            <a:noFill/>
+          </a:ln>
+        </p:spPr>
+        <p:style>
+          <a:lnRef idx="1">
+            <a:schemeClr val="accent1"/>
+          </a:lnRef>
+          <a:fillRef idx="3">
+            <a:schemeClr val="accent1"/>
+          </a:fillRef>
+          <a:effectRef idx="2">
+            <a:schemeClr val="accent1"/>
+          </a:effectRef>
+          <a:fontRef idx="minor">
+            <a:schemeClr val="lt1"/>
+          </a:fontRef>
+        </p:style>
+        <p:txBody>
+          <a:bodyPr rtlCol="0" anchor="ctr"/>
+          <a:lstStyle/>
+          <a:p>
+            <a:pPr algn="ctr"/>
+          </a:p>
+        </p:txBody>
+      </p:sp>
+      <p:sp>
+        <p:nvSpPr>
+          <p:cNvPr id="7" name="Rectangle 6"/>
+          <p:cNvSpPr/>
+          <p:nvPr/>
+        </p:nvSpPr>
+        <p:spPr>
+          <a:xfrm rot="18900000">
+            <a:off x="8915400" y="4133088"/>
+            <a:ext cx="5029200" cy="237744"/>
+          </a:xfrm>
+          <a:prstGeom prst="rect">
+            <a:avLst/>
+          </a:prstGeom>
+          <a:solidFill>
+            <a:srgbClr val="C4E8E2"/>
+          </a:solidFill>
+          <a:ln>
+            <a:noFill/>
+          </a:ln>
+        </p:spPr>
+        <p:style>
+          <a:lnRef idx="1">
+            <a:schemeClr val="accent1"/>
+          </a:lnRef>
+          <a:fillRef idx="3">
+            <a:schemeClr val="accent1"/>
+          </a:fillRef>
+          <a:effectRef idx="2">
+            <a:schemeClr val="accent1"/>
+          </a:effectRef>
+          <a:fontRef idx="minor">
+            <a:schemeClr val="lt1"/>
+          </a:fontRef>
+        </p:style>
+        <p:txBody>
+          <a:bodyPr rtlCol="0" anchor="ctr"/>
+          <a:lstStyle/>
+          <a:p>
+            <a:pPr algn="ctr"/>
+          </a:p>
+        </p:txBody>
+      </p:sp>
+      <p:sp>
+        <p:nvSpPr>
+          <p:cNvPr id="8" name="TextBox 7"/>
+          <p:cNvSpPr txBox="1"/>
+          <p:nvPr/>
+        </p:nvSpPr>
+        <p:spPr>
+          <a:xfrm>
+            <a:off x="11137392" y="6473952"/>
+            <a:ext cx="914400" cy="320040"/>
+          </a:xfrm>
+          <a:prstGeom prst="rect">
+            <a:avLst/>
+          </a:prstGeom>
+          <a:noFill/>
+        </p:spPr>
+        <p:txBody>
+          <a:bodyPr wrap="none">
+            <a:spAutoFit/>
+          </a:bodyPr>
+          <a:lstStyle/>
+          <a:p>
+            <a:pPr algn="r"/>
+            <a:r>
+              <a:rPr sz="1000">
+                <a:solidFill>
+                  <a:srgbClr val="505050"/>
+                </a:solidFill>
+                <a:latin typeface="Calibri"/>
+              </a:rPr>
+              <a:t>6 / 8</a:t>
+            </a:r>
+          </a:p>
+        </p:txBody>
+      </p:sp>
+      <p:sp>
+        <p:nvSpPr>
+          <p:cNvPr id="9" name="TextBox 8"/>
+          <p:cNvSpPr txBox="1"/>
+          <p:nvPr/>
+        </p:nvSpPr>
+        <p:spPr>
+          <a:xfrm>
+            <a:off x="457200" y="685800"/>
+            <a:ext cx="11274552" cy="594360"/>
+          </a:xfrm>
+          <a:prstGeom prst="rect">
+            <a:avLst/>
+          </a:prstGeom>
+          <a:noFill/>
+        </p:spPr>
+        <p:txBody>
+          <a:bodyPr wrap="square">
+            <a:spAutoFit/>
+          </a:bodyPr>
+          <a:lstStyle/>
+          <a:p>
+            <a:pPr algn="l"/>
+            <a:r>
+              <a:rPr sz="2200" b="1">
+                <a:solidFill>
+                  <a:srgbClr val="107C6E"/>
+                </a:solidFill>
+                <a:latin typeface="Calibri"/>
+              </a:rPr>
+              <a:t>5.  </a:t>
+            </a:r>
+            <a:r>
+              <a:rPr sz="2200" b="1">
+                <a:solidFill>
+                  <a:srgbClr val="107C6E"/>
+                </a:solidFill>
+                <a:latin typeface="Calibri"/>
+              </a:rPr>
+              <a:t>Lightweight OS Does Not Mean Lightweight CNI</a:t>
+            </a:r>
+          </a:p>
+        </p:txBody>
+      </p:sp>
+      <p:sp>
+        <p:nvSpPr>
+          <p:cNvPr id="10" name="Rectangle 9"/>
+          <p:cNvSpPr/>
+          <p:nvPr/>
+        </p:nvSpPr>
+        <p:spPr>
+          <a:xfrm>
+            <a:off x="457200" y="1252728"/>
+            <a:ext cx="11274552" cy="22860"/>
+          </a:xfrm>
+          <a:prstGeom prst="rect">
+            <a:avLst/>
+          </a:prstGeom>
+          <a:solidFill>
+            <a:srgbClr val="107C6E"/>
+          </a:solidFill>
+          <a:ln>
+            <a:noFill/>
+          </a:ln>
+        </p:spPr>
+        <p:style>
+          <a:lnRef idx="1">
+            <a:schemeClr val="accent1"/>
+          </a:lnRef>
+          <a:fillRef idx="3">
+            <a:schemeClr val="accent1"/>
+          </a:fillRef>
+          <a:effectRef idx="2">
+            <a:schemeClr val="accent1"/>
+          </a:effectRef>
+          <a:fontRef idx="minor">
+            <a:schemeClr val="lt1"/>
+          </a:fontRef>
+        </p:style>
+        <p:txBody>
+          <a:bodyPr rtlCol="0" anchor="ctr"/>
+          <a:lstStyle/>
+          <a:p>
+            <a:pPr algn="ctr"/>
+          </a:p>
+        </p:txBody>
+      </p:sp>
       <p:pic>
         <p:nvPicPr>
-          <p:cNvPr id="6" name="Picture 5" descr="cpu_ram_grid.png"/>
+          <p:cNvPr id="11" name="Picture 10" descr="cpu_ram_grid.png"/>
           <p:cNvPicPr>
             <a:picLocks noChangeAspect="1"/>
           </p:cNvPicPr>
@@ -5766,8 +7478,8 @@
         </p:blipFill>
         <p:spPr>
           <a:xfrm>
-            <a:off x="365760" y="1143000"/>
-            <a:ext cx="6492240" cy="5074920"/>
+            <a:off x="365760" y="1325880"/>
+            <a:ext cx="6400800" cy="5029200"/>
           </a:xfrm>
           <a:prstGeom prst="rect">
             <a:avLst/>
@@ -5776,14 +7488,49 @@
       </p:pic>
       <p:sp>
         <p:nvSpPr>
-          <p:cNvPr id="7" name="TextBox 6"/>
+          <p:cNvPr id="12" name="TextBox 11"/>
           <p:cNvSpPr txBox="1"/>
           <p:nvPr/>
         </p:nvSpPr>
         <p:spPr>
           <a:xfrm>
-            <a:off x="7132320" y="1188720"/>
-            <a:ext cx="4663440" cy="5029200"/>
+            <a:off x="365760" y="6373368"/>
+            <a:ext cx="6400800" cy="274320"/>
+          </a:xfrm>
+          <a:prstGeom prst="rect">
+            <a:avLst/>
+          </a:prstGeom>
+          <a:noFill/>
+        </p:spPr>
+        <p:txBody>
+          <a:bodyPr wrap="none">
+            <a:spAutoFit/>
+          </a:bodyPr>
+          <a:lstStyle/>
+          <a:p>
+            <a:pPr algn="ctr"/>
+            <a:r>
+              <a:rPr sz="950" i="1">
+                <a:solidFill>
+                  <a:srgbClr val="505050"/>
+                </a:solidFill>
+                <a:latin typeface="Calibri"/>
+              </a:rPr>
+              <a:t>Fig. 2 – CPU and RAM Utilization across Vanilla and Edge K8s Distributions</a:t>
+            </a:r>
+          </a:p>
+        </p:txBody>
+      </p:sp>
+      <p:sp>
+        <p:nvSpPr>
+          <p:cNvPr id="13" name="TextBox 12"/>
+          <p:cNvSpPr txBox="1"/>
+          <p:nvPr/>
+        </p:nvSpPr>
+        <p:spPr>
+          <a:xfrm>
+            <a:off x="7040880" y="1325880"/>
+            <a:ext cx="4754880" cy="5166360"/>
           </a:xfrm>
           <a:prstGeom prst="rect">
             <a:avLst/>
@@ -5798,135 +7545,121 @@
           <a:p>
             <a:pPr algn="l">
               <a:spcBef>
-                <a:spcPts val="600"/>
+                <a:spcPts val="400"/>
               </a:spcBef>
-              <a:spcAft>
-                <a:spcPts val="0"/>
-              </a:spcAft>
             </a:pPr>
             <a:r>
-              <a:rPr sz="1600" b="0">
-                <a:solidFill>
-                  <a:srgbClr val="4FC3F7"/>
-                </a:solidFill>
-              </a:rPr>
-              <a:t>▸  </a:t>
-            </a:r>
-            <a:r>
-              <a:rPr b="1" i="0" sz="1800">
-                <a:solidFill>
-                  <a:srgbClr val="FFD166"/>
-                </a:solidFill>
-              </a:rPr>
-              <a:t>CPU Stability:</a:t>
-            </a:r>
-            <a:r>
-              <a:rPr b="0" i="0" sz="1800">
-                <a:solidFill>
-                  <a:srgbClr val="E0EAF6"/>
-                </a:solidFill>
-              </a:rPr>
-              <a:t> CPU utilization remains largely static across vanilla and edge Kubernetes distributions.</a:t>
+              <a:rPr sz="1500" b="1">
+                <a:solidFill>
+                  <a:srgbClr val="107C6E"/>
+                </a:solidFill>
+                <a:latin typeface="Calibri"/>
+              </a:rPr>
+              <a:t>Inferences:</a:t>
             </a:r>
           </a:p>
           <a:p>
             <a:pPr algn="l">
               <a:spcBef>
-                <a:spcPts val="600"/>
+                <a:spcPts val="700"/>
               </a:spcBef>
-              <a:spcAft>
-                <a:spcPts val="0"/>
-              </a:spcAft>
             </a:pPr>
             <a:r>
-              <a:rPr sz="1600" b="0">
-                <a:solidFill>
-                  <a:srgbClr val="4FC3F7"/>
-                </a:solidFill>
-              </a:rPr>
-              <a:t>▸  </a:t>
-            </a:r>
-            <a:r>
-              <a:rPr b="1" i="0" sz="1800">
-                <a:solidFill>
-                  <a:srgbClr val="FFD166"/>
-                </a:solidFill>
+              <a:rPr sz="1500">
+                <a:solidFill>
+                  <a:srgbClr val="1A1A1A"/>
+                </a:solidFill>
+                <a:latin typeface="Calibri"/>
+              </a:rPr>
+              <a:t>•  </a:t>
+            </a:r>
+            <a:r>
+              <a:rPr sz="1500" b="1">
+                <a:solidFill>
+                  <a:srgbClr val="075048"/>
+                </a:solidFill>
+                <a:latin typeface="Calibri"/>
+              </a:rPr>
+              <a:t>CPU Stability:</a:t>
+            </a:r>
+            <a:r>
+              <a:rPr sz="1500" b="0">
+                <a:solidFill>
+                  <a:srgbClr val="1A1A1A"/>
+                </a:solidFill>
+                <a:latin typeface="Calibri"/>
+              </a:rPr>
+              <a:t> CPU utilization remains largely static across vanilla and edge Kubernetes distributions.</a:t>
+            </a:r>
+          </a:p>
+          <a:p>
+            <a:pPr algn="l">
+              <a:spcBef>
+                <a:spcPts val="700"/>
+              </a:spcBef>
+            </a:pPr>
+            <a:r>
+              <a:rPr sz="1500">
+                <a:solidFill>
+                  <a:srgbClr val="1A1A1A"/>
+                </a:solidFill>
+                <a:latin typeface="Calibri"/>
+              </a:rPr>
+              <a:t>•  </a:t>
+            </a:r>
+            <a:r>
+              <a:rPr sz="1500" b="1">
+                <a:solidFill>
+                  <a:srgbClr val="075048"/>
+                </a:solidFill>
+                <a:latin typeface="Calibri"/>
               </a:rPr>
               <a:t>RAM Penalty:</a:t>
             </a:r>
             <a:r>
-              <a:rPr b="0" i="0" sz="1800">
-                <a:solidFill>
-                  <a:srgbClr val="E0EAF6"/>
-                </a:solidFill>
+              <a:rPr sz="1500" b="0">
+                <a:solidFill>
+                  <a:srgbClr val="1A1A1A"/>
+                </a:solidFill>
+                <a:latin typeface="Calibri"/>
               </a:rPr>
               <a:t> Flannel reduces RAM usage by </a:t>
             </a:r>
             <a:r>
-              <a:rPr b="1" i="0" sz="1800">
-                <a:solidFill>
-                  <a:srgbClr val="FFD166"/>
-                </a:solidFill>
+              <a:rPr sz="1500" b="1">
+                <a:solidFill>
+                  <a:srgbClr val="075048"/>
+                </a:solidFill>
+                <a:latin typeface="Calibri"/>
               </a:rPr>
               <a:t>28%</a:t>
             </a:r>
             <a:r>
-              <a:rPr b="0" i="0" sz="1800">
-                <a:solidFill>
-                  <a:srgbClr val="E0EAF6"/>
-                </a:solidFill>
+              <a:rPr sz="1500" b="0">
+                <a:solidFill>
+                  <a:srgbClr val="1A1A1A"/>
+                </a:solidFill>
+                <a:latin typeface="Calibri"/>
               </a:rPr>
               <a:t> in K3s, but complex plugins (Cilium) see a </a:t>
             </a:r>
             <a:r>
-              <a:rPr b="1" i="0" sz="1800">
-                <a:solidFill>
-                  <a:srgbClr val="FFD166"/>
-                </a:solidFill>
+              <a:rPr sz="1500" b="1">
+                <a:solidFill>
+                  <a:srgbClr val="075048"/>
+                </a:solidFill>
+                <a:latin typeface="Calibri"/>
               </a:rPr>
               <a:t>14% memory increase</a:t>
             </a:r>
             <a:r>
-              <a:rPr b="0" i="0" sz="1800">
-                <a:solidFill>
-                  <a:srgbClr val="E0EAF6"/>
-                </a:solidFill>
+              <a:rPr sz="1500" b="0">
+                <a:solidFill>
+                  <a:srgbClr val="1A1A1A"/>
+                </a:solidFill>
+                <a:latin typeface="Calibri"/>
               </a:rPr>
               <a:t>.</a:t>
-            </a:r>
-          </a:p>
-        </p:txBody>
-      </p:sp>
-      <p:sp>
-        <p:nvSpPr>
-          <p:cNvPr id="8" name="TextBox 7"/>
-          <p:cNvSpPr txBox="1"/>
-          <p:nvPr/>
-        </p:nvSpPr>
-        <p:spPr>
-          <a:xfrm>
-            <a:off x="365760" y="6263640"/>
-            <a:ext cx="6492240" cy="274320"/>
-          </a:xfrm>
-          <a:prstGeom prst="rect">
-            <a:avLst/>
-          </a:prstGeom>
-          <a:noFill/>
-        </p:spPr>
-        <p:txBody>
-          <a:bodyPr wrap="none">
-            <a:spAutoFit/>
-          </a:bodyPr>
-          <a:lstStyle/>
-          <a:p>
-            <a:pPr algn="ctr"/>
-            <a:r>
-              <a:rPr sz="1000" i="1">
-                <a:solidFill>
-                  <a:srgbClr val="ADC8E6"/>
-                </a:solidFill>
-              </a:rPr>
-              <a:t>Fig. 2 – CPU and RAM Utilization across Vanilla and Edge K8s Distributions</a:t>
             </a:r>
           </a:p>
         </p:txBody>
@@ -5945,7 +7678,7 @@
     <p:bg>
       <p:bgPr>
         <a:solidFill>
-          <a:srgbClr val="0D1B2A"/>
+          <a:srgbClr val="FFFFFF"/>
         </a:solidFill>
         <a:effectLst/>
       </p:bgPr>
@@ -5965,14 +7698,14 @@
         </p:nvSpPr>
         <p:spPr>
           <a:xfrm>
-            <a:off x="0" y="73152"/>
-            <a:ext cx="12188952" cy="41148"/>
+            <a:off x="0" y="548640"/>
+            <a:ext cx="12188952" cy="10972"/>
           </a:xfrm>
           <a:prstGeom prst="rect">
             <a:avLst/>
           </a:prstGeom>
           <a:solidFill>
-            <a:srgbClr val="4FC3F7"/>
+            <a:srgbClr val="BBBBBB"/>
           </a:solidFill>
           <a:ln>
             <a:noFill/>
@@ -6008,15 +7741,13 @@
         </p:nvSpPr>
         <p:spPr>
           <a:xfrm>
-            <a:off x="9966960" y="137160"/>
-            <a:ext cx="1828800" cy="365760"/>
-          </a:xfrm>
-          <a:prstGeom prst="rect">
-            <a:avLst/>
-          </a:prstGeom>
-          <a:solidFill>
-            <a:srgbClr val="4FC3F7"/>
-          </a:solidFill>
+            <a:off x="164592" y="54864"/>
+            <a:ext cx="4389120" cy="493776"/>
+          </a:xfrm>
+          <a:prstGeom prst="rect">
+            <a:avLst/>
+          </a:prstGeom>
+          <a:noFill/>
         </p:spPr>
         <p:txBody>
           <a:bodyPr wrap="none">
@@ -6024,76 +7755,69 @@
           </a:bodyPr>
           <a:lstStyle/>
           <a:p>
-            <a:pPr algn="ctr"/>
-            <a:r>
-              <a:rPr sz="1100" b="1">
-                <a:solidFill>
-                  <a:srgbClr val="0D1B2A"/>
-                </a:solidFill>
-              </a:rPr>
-              <a:t>RESULTS 3/3</a:t>
-            </a:r>
-          </a:p>
-        </p:txBody>
-      </p:sp>
-      <p:sp>
-        <p:nvSpPr>
-          <p:cNvPr id="4" name="TextBox 3"/>
-          <p:cNvSpPr txBox="1"/>
-          <p:nvPr/>
-        </p:nvSpPr>
-        <p:spPr>
-          <a:xfrm>
-            <a:off x="457200" y="182880"/>
-            <a:ext cx="11274552" cy="822960"/>
-          </a:xfrm>
-          <a:prstGeom prst="rect">
-            <a:avLst/>
-          </a:prstGeom>
-          <a:noFill/>
-        </p:spPr>
-        <p:txBody>
-          <a:bodyPr wrap="square">
-            <a:spAutoFit/>
-          </a:bodyPr>
-          <a:lstStyle/>
-          <a:p>
             <a:pPr algn="l"/>
             <a:r>
-              <a:rPr b="1" i="0" sz="2800">
-                <a:solidFill>
-                  <a:srgbClr val="FFD166"/>
-                </a:solidFill>
-              </a:rPr>
-              <a:t>eBPF</a:t>
-            </a:r>
-            <a:r>
-              <a:rPr b="0" i="0" sz="2800">
-                <a:solidFill>
-                  <a:srgbClr val="FFFFFF"/>
-                </a:solidFill>
-              </a:rPr>
-              <a:t> Maximizes Resource Efficiency Under Load</a:t>
-            </a:r>
-          </a:p>
-        </p:txBody>
-      </p:sp>
-      <p:sp>
-        <p:nvSpPr>
-          <p:cNvPr id="5" name="Rectangle 4"/>
+              <a:rPr sz="1700" b="1">
+                <a:solidFill>
+                  <a:srgbClr val="107C6E"/>
+                </a:solidFill>
+                <a:latin typeface="Calibri"/>
+              </a:rPr>
+              <a:t>IIID</a:t>
+            </a:r>
+            <a:r>
+              <a:rPr sz="750">
+                <a:solidFill>
+                  <a:srgbClr val="505050"/>
+                </a:solidFill>
+                <a:latin typeface="Calibri"/>
+              </a:rPr>
+              <a:t>   INDRAPRASTHA INSTITUTE of</a:t>
+            </a:r>
+          </a:p>
+          <a:p>
+            <a:pPr algn="l">
+              <a:spcBef>
+                <a:spcPts val="0"/>
+              </a:spcBef>
+            </a:pPr>
+            <a:r>
+              <a:rPr sz="750">
+                <a:solidFill>
+                  <a:srgbClr val="505050"/>
+                </a:solidFill>
+                <a:latin typeface="Calibri"/>
+              </a:rPr>
+              <a:t>           INFORMATION TECHNOLOGY </a:t>
+            </a:r>
+            <a:r>
+              <a:rPr sz="750" b="1">
+                <a:solidFill>
+                  <a:srgbClr val="107C6E"/>
+                </a:solidFill>
+                <a:latin typeface="Calibri"/>
+              </a:rPr>
+              <a:t>DELHI</a:t>
+            </a:r>
+          </a:p>
+        </p:txBody>
+      </p:sp>
+      <p:sp>
+        <p:nvSpPr>
+          <p:cNvPr id="4" name="Rectangle 3"/>
           <p:cNvSpPr/>
           <p:nvPr/>
         </p:nvSpPr>
         <p:spPr>
-          <a:xfrm>
-            <a:off x="457200" y="1051560"/>
-            <a:ext cx="11274552" cy="7315"/>
+          <a:xfrm rot="18900000">
+            <a:off x="7543800" y="5641848"/>
+            <a:ext cx="5029200" cy="237744"/>
           </a:xfrm>
           <a:prstGeom prst="rect">
             <a:avLst/>
           </a:prstGeom>
           <a:solidFill>
-            <a:srgbClr val="4FC3F7"/>
+            <a:srgbClr val="C4E8E2"/>
           </a:solidFill>
           <a:ln>
             <a:noFill/>
@@ -6121,9 +7845,260 @@
           </a:p>
         </p:txBody>
       </p:sp>
+      <p:sp>
+        <p:nvSpPr>
+          <p:cNvPr id="5" name="Rectangle 4"/>
+          <p:cNvSpPr/>
+          <p:nvPr/>
+        </p:nvSpPr>
+        <p:spPr>
+          <a:xfrm rot="18900000">
+            <a:off x="8001000" y="5138928"/>
+            <a:ext cx="5029200" cy="237744"/>
+          </a:xfrm>
+          <a:prstGeom prst="rect">
+            <a:avLst/>
+          </a:prstGeom>
+          <a:solidFill>
+            <a:srgbClr val="C4E8E2"/>
+          </a:solidFill>
+          <a:ln>
+            <a:noFill/>
+          </a:ln>
+        </p:spPr>
+        <p:style>
+          <a:lnRef idx="1">
+            <a:schemeClr val="accent1"/>
+          </a:lnRef>
+          <a:fillRef idx="3">
+            <a:schemeClr val="accent1"/>
+          </a:fillRef>
+          <a:effectRef idx="2">
+            <a:schemeClr val="accent1"/>
+          </a:effectRef>
+          <a:fontRef idx="minor">
+            <a:schemeClr val="lt1"/>
+          </a:fontRef>
+        </p:style>
+        <p:txBody>
+          <a:bodyPr rtlCol="0" anchor="ctr"/>
+          <a:lstStyle/>
+          <a:p>
+            <a:pPr algn="ctr"/>
+          </a:p>
+        </p:txBody>
+      </p:sp>
+      <p:sp>
+        <p:nvSpPr>
+          <p:cNvPr id="6" name="Rectangle 5"/>
+          <p:cNvSpPr/>
+          <p:nvPr/>
+        </p:nvSpPr>
+        <p:spPr>
+          <a:xfrm rot="18900000">
+            <a:off x="8458200" y="4636008"/>
+            <a:ext cx="5029200" cy="237744"/>
+          </a:xfrm>
+          <a:prstGeom prst="rect">
+            <a:avLst/>
+          </a:prstGeom>
+          <a:solidFill>
+            <a:srgbClr val="C4E8E2"/>
+          </a:solidFill>
+          <a:ln>
+            <a:noFill/>
+          </a:ln>
+        </p:spPr>
+        <p:style>
+          <a:lnRef idx="1">
+            <a:schemeClr val="accent1"/>
+          </a:lnRef>
+          <a:fillRef idx="3">
+            <a:schemeClr val="accent1"/>
+          </a:fillRef>
+          <a:effectRef idx="2">
+            <a:schemeClr val="accent1"/>
+          </a:effectRef>
+          <a:fontRef idx="minor">
+            <a:schemeClr val="lt1"/>
+          </a:fontRef>
+        </p:style>
+        <p:txBody>
+          <a:bodyPr rtlCol="0" anchor="ctr"/>
+          <a:lstStyle/>
+          <a:p>
+            <a:pPr algn="ctr"/>
+          </a:p>
+        </p:txBody>
+      </p:sp>
+      <p:sp>
+        <p:nvSpPr>
+          <p:cNvPr id="7" name="Rectangle 6"/>
+          <p:cNvSpPr/>
+          <p:nvPr/>
+        </p:nvSpPr>
+        <p:spPr>
+          <a:xfrm rot="18900000">
+            <a:off x="8915400" y="4133088"/>
+            <a:ext cx="5029200" cy="237744"/>
+          </a:xfrm>
+          <a:prstGeom prst="rect">
+            <a:avLst/>
+          </a:prstGeom>
+          <a:solidFill>
+            <a:srgbClr val="C4E8E2"/>
+          </a:solidFill>
+          <a:ln>
+            <a:noFill/>
+          </a:ln>
+        </p:spPr>
+        <p:style>
+          <a:lnRef idx="1">
+            <a:schemeClr val="accent1"/>
+          </a:lnRef>
+          <a:fillRef idx="3">
+            <a:schemeClr val="accent1"/>
+          </a:fillRef>
+          <a:effectRef idx="2">
+            <a:schemeClr val="accent1"/>
+          </a:effectRef>
+          <a:fontRef idx="minor">
+            <a:schemeClr val="lt1"/>
+          </a:fontRef>
+        </p:style>
+        <p:txBody>
+          <a:bodyPr rtlCol="0" anchor="ctr"/>
+          <a:lstStyle/>
+          <a:p>
+            <a:pPr algn="ctr"/>
+          </a:p>
+        </p:txBody>
+      </p:sp>
+      <p:sp>
+        <p:nvSpPr>
+          <p:cNvPr id="8" name="TextBox 7"/>
+          <p:cNvSpPr txBox="1"/>
+          <p:nvPr/>
+        </p:nvSpPr>
+        <p:spPr>
+          <a:xfrm>
+            <a:off x="11137392" y="6473952"/>
+            <a:ext cx="914400" cy="320040"/>
+          </a:xfrm>
+          <a:prstGeom prst="rect">
+            <a:avLst/>
+          </a:prstGeom>
+          <a:noFill/>
+        </p:spPr>
+        <p:txBody>
+          <a:bodyPr wrap="none">
+            <a:spAutoFit/>
+          </a:bodyPr>
+          <a:lstStyle/>
+          <a:p>
+            <a:pPr algn="r"/>
+            <a:r>
+              <a:rPr sz="1000">
+                <a:solidFill>
+                  <a:srgbClr val="505050"/>
+                </a:solidFill>
+                <a:latin typeface="Calibri"/>
+              </a:rPr>
+              <a:t>7 / 8</a:t>
+            </a:r>
+          </a:p>
+        </p:txBody>
+      </p:sp>
+      <p:sp>
+        <p:nvSpPr>
+          <p:cNvPr id="9" name="TextBox 8"/>
+          <p:cNvSpPr txBox="1"/>
+          <p:nvPr/>
+        </p:nvSpPr>
+        <p:spPr>
+          <a:xfrm>
+            <a:off x="457200" y="685800"/>
+            <a:ext cx="11274552" cy="594360"/>
+          </a:xfrm>
+          <a:prstGeom prst="rect">
+            <a:avLst/>
+          </a:prstGeom>
+          <a:noFill/>
+        </p:spPr>
+        <p:txBody>
+          <a:bodyPr wrap="square">
+            <a:spAutoFit/>
+          </a:bodyPr>
+          <a:lstStyle/>
+          <a:p>
+            <a:pPr algn="l"/>
+            <a:r>
+              <a:rPr sz="2200" b="1">
+                <a:solidFill>
+                  <a:srgbClr val="107C6E"/>
+                </a:solidFill>
+                <a:latin typeface="Calibri"/>
+              </a:rPr>
+              <a:t>6.  </a:t>
+            </a:r>
+            <a:r>
+              <a:rPr sz="2200" b="1">
+                <a:solidFill>
+                  <a:srgbClr val="107C6E"/>
+                </a:solidFill>
+                <a:latin typeface="Calibri"/>
+              </a:rPr>
+              <a:t>eBPF Maximizes Resource Efficiency Under Load</a:t>
+            </a:r>
+          </a:p>
+        </p:txBody>
+      </p:sp>
+      <p:sp>
+        <p:nvSpPr>
+          <p:cNvPr id="10" name="Rectangle 9"/>
+          <p:cNvSpPr/>
+          <p:nvPr/>
+        </p:nvSpPr>
+        <p:spPr>
+          <a:xfrm>
+            <a:off x="457200" y="1252728"/>
+            <a:ext cx="11274552" cy="22860"/>
+          </a:xfrm>
+          <a:prstGeom prst="rect">
+            <a:avLst/>
+          </a:prstGeom>
+          <a:solidFill>
+            <a:srgbClr val="107C6E"/>
+          </a:solidFill>
+          <a:ln>
+            <a:noFill/>
+          </a:ln>
+        </p:spPr>
+        <p:style>
+          <a:lnRef idx="1">
+            <a:schemeClr val="accent1"/>
+          </a:lnRef>
+          <a:fillRef idx="3">
+            <a:schemeClr val="accent1"/>
+          </a:fillRef>
+          <a:effectRef idx="2">
+            <a:schemeClr val="accent1"/>
+          </a:effectRef>
+          <a:fontRef idx="minor">
+            <a:schemeClr val="lt1"/>
+          </a:fontRef>
+        </p:style>
+        <p:txBody>
+          <a:bodyPr rtlCol="0" anchor="ctr"/>
+          <a:lstStyle/>
+          <a:p>
+            <a:pPr algn="ctr"/>
+          </a:p>
+        </p:txBody>
+      </p:sp>
       <p:pic>
         <p:nvPicPr>
-          <p:cNvPr id="6" name="Picture 5" descr="tables_section.png"/>
+          <p:cNvPr id="11" name="Picture 10" descr="tables_section.png"/>
           <p:cNvPicPr>
             <a:picLocks noChangeAspect="1"/>
           </p:cNvPicPr>
@@ -6137,8 +8112,8 @@
         </p:blipFill>
         <p:spPr>
           <a:xfrm>
-            <a:off x="365760" y="1143000"/>
-            <a:ext cx="6492240" cy="5074920"/>
+            <a:off x="365760" y="1325880"/>
+            <a:ext cx="6400800" cy="5029200"/>
           </a:xfrm>
           <a:prstGeom prst="rect">
             <a:avLst/>
@@ -6147,14 +8122,49 @@
       </p:pic>
       <p:sp>
         <p:nvSpPr>
-          <p:cNvPr id="7" name="TextBox 6"/>
+          <p:cNvPr id="12" name="TextBox 11"/>
           <p:cNvSpPr txBox="1"/>
           <p:nvPr/>
         </p:nvSpPr>
         <p:spPr>
           <a:xfrm>
-            <a:off x="7132320" y="1188720"/>
-            <a:ext cx="4663440" cy="5029200"/>
+            <a:off x="365760" y="6373368"/>
+            <a:ext cx="6400800" cy="274320"/>
+          </a:xfrm>
+          <a:prstGeom prst="rect">
+            <a:avLst/>
+          </a:prstGeom>
+          <a:noFill/>
+        </p:spPr>
+        <p:txBody>
+          <a:bodyPr wrap="none">
+            <a:spAutoFit/>
+          </a:bodyPr>
+          <a:lstStyle/>
+          <a:p>
+            <a:pPr algn="ctr"/>
+            <a:r>
+              <a:rPr sz="950" i="1">
+                <a:solidFill>
+                  <a:srgbClr val="505050"/>
+                </a:solidFill>
+                <a:latin typeface="Calibri"/>
+              </a:rPr>
+              <a:t>Tables 1–4: iptables vs. eBPF – Unloaded and Loaded Cluster Results</a:t>
+            </a:r>
+          </a:p>
+        </p:txBody>
+      </p:sp>
+      <p:sp>
+        <p:nvSpPr>
+          <p:cNvPr id="13" name="TextBox 12"/>
+          <p:cNvSpPr txBox="1"/>
+          <p:nvPr/>
+        </p:nvSpPr>
+        <p:spPr>
+          <a:xfrm>
+            <a:off x="7040880" y="1325880"/>
+            <a:ext cx="4754880" cy="5166360"/>
           </a:xfrm>
           <a:prstGeom prst="rect">
             <a:avLst/>
@@ -6169,151 +8179,139 @@
           <a:p>
             <a:pPr algn="l">
               <a:spcBef>
-                <a:spcPts val="600"/>
+                <a:spcPts val="400"/>
               </a:spcBef>
-              <a:spcAft>
-                <a:spcPts val="0"/>
-              </a:spcAft>
             </a:pPr>
             <a:r>
-              <a:rPr sz="1600" b="0">
-                <a:solidFill>
-                  <a:srgbClr val="4FC3F7"/>
-                </a:solidFill>
-              </a:rPr>
-              <a:t>▸  </a:t>
-            </a:r>
-            <a:r>
-              <a:rPr b="1" i="0" sz="1800">
-                <a:solidFill>
-                  <a:srgbClr val="FFD166"/>
-                </a:solidFill>
-              </a:rPr>
-              <a:t>Idle State:</a:t>
-            </a:r>
-            <a:r>
-              <a:rPr b="0" i="0" sz="1800">
-                <a:solidFill>
-                  <a:srgbClr val="E0EAF6"/>
-                </a:solidFill>
-              </a:rPr>
-              <a:t> Traditional iptables achieves higher throughput (</a:t>
-            </a:r>
-            <a:r>
-              <a:rPr b="1" i="0" sz="1800">
-                <a:solidFill>
-                  <a:srgbClr val="FFD166"/>
-                </a:solidFill>
-              </a:rPr>
-              <a:t>7850 Mbps</a:t>
-            </a:r>
-            <a:r>
-              <a:rPr b="0" i="0" sz="1800">
-                <a:solidFill>
-                  <a:srgbClr val="E0EAF6"/>
-                </a:solidFill>
-              </a:rPr>
-              <a:t>) when cluster is unloaded.</a:t>
+              <a:rPr sz="1500" b="1">
+                <a:solidFill>
+                  <a:srgbClr val="107C6E"/>
+                </a:solidFill>
+                <a:latin typeface="Calibri"/>
+              </a:rPr>
+              <a:t>Inferences:</a:t>
             </a:r>
           </a:p>
           <a:p>
             <a:pPr algn="l">
               <a:spcBef>
-                <a:spcPts val="600"/>
+                <a:spcPts val="700"/>
               </a:spcBef>
-              <a:spcAft>
-                <a:spcPts val="0"/>
-              </a:spcAft>
             </a:pPr>
             <a:r>
-              <a:rPr sz="1600" b="0">
-                <a:solidFill>
-                  <a:srgbClr val="4FC3F7"/>
-                </a:solidFill>
-              </a:rPr>
-              <a:t>▸  </a:t>
-            </a:r>
-            <a:r>
-              <a:rPr b="1" i="0" sz="1800">
-                <a:solidFill>
-                  <a:srgbClr val="FFD166"/>
-                </a:solidFill>
+              <a:rPr sz="1500">
+                <a:solidFill>
+                  <a:srgbClr val="1A1A1A"/>
+                </a:solidFill>
+                <a:latin typeface="Calibri"/>
+              </a:rPr>
+              <a:t>•  </a:t>
+            </a:r>
+            <a:r>
+              <a:rPr sz="1500" b="1">
+                <a:solidFill>
+                  <a:srgbClr val="075048"/>
+                </a:solidFill>
+                <a:latin typeface="Calibri"/>
+              </a:rPr>
+              <a:t>Idle State:</a:t>
+            </a:r>
+            <a:r>
+              <a:rPr sz="1500" b="0">
+                <a:solidFill>
+                  <a:srgbClr val="1A1A1A"/>
+                </a:solidFill>
+                <a:latin typeface="Calibri"/>
+              </a:rPr>
+              <a:t> Traditional iptables achieves higher throughput (</a:t>
+            </a:r>
+            <a:r>
+              <a:rPr sz="1500" b="1">
+                <a:solidFill>
+                  <a:srgbClr val="075048"/>
+                </a:solidFill>
+                <a:latin typeface="Calibri"/>
+              </a:rPr>
+              <a:t>7850 Mbps</a:t>
+            </a:r>
+            <a:r>
+              <a:rPr sz="1500" b="0">
+                <a:solidFill>
+                  <a:srgbClr val="1A1A1A"/>
+                </a:solidFill>
+                <a:latin typeface="Calibri"/>
+              </a:rPr>
+              <a:t>) when cluster is unloaded.</a:t>
+            </a:r>
+          </a:p>
+          <a:p>
+            <a:pPr algn="l">
+              <a:spcBef>
+                <a:spcPts val="700"/>
+              </a:spcBef>
+            </a:pPr>
+            <a:r>
+              <a:rPr sz="1500">
+                <a:solidFill>
+                  <a:srgbClr val="1A1A1A"/>
+                </a:solidFill>
+                <a:latin typeface="Calibri"/>
+              </a:rPr>
+              <a:t>•  </a:t>
+            </a:r>
+            <a:r>
+              <a:rPr sz="1500" b="1">
+                <a:solidFill>
+                  <a:srgbClr val="075048"/>
+                </a:solidFill>
+                <a:latin typeface="Calibri"/>
               </a:rPr>
               <a:t>Production Load:</a:t>
             </a:r>
             <a:r>
-              <a:rPr b="0" i="0" sz="1800">
-                <a:solidFill>
-                  <a:srgbClr val="E0EAF6"/>
-                </a:solidFill>
+              <a:rPr sz="1500" b="0">
+                <a:solidFill>
+                  <a:srgbClr val="1A1A1A"/>
+                </a:solidFill>
+                <a:latin typeface="Calibri"/>
               </a:rPr>
               <a:t> Under heavy stress, eBPF cuts </a:t>
             </a:r>
             <a:r>
-              <a:rPr b="1" i="0" sz="1800">
-                <a:solidFill>
-                  <a:srgbClr val="FFD166"/>
-                </a:solidFill>
+              <a:rPr sz="1500" b="1">
+                <a:solidFill>
+                  <a:srgbClr val="075048"/>
+                </a:solidFill>
+                <a:latin typeface="Calibri"/>
               </a:rPr>
               <a:t>CPU usage by ~5%</a:t>
             </a:r>
             <a:r>
-              <a:rPr b="0" i="0" sz="1800">
-                <a:solidFill>
-                  <a:srgbClr val="E0EAF6"/>
-                </a:solidFill>
+              <a:rPr sz="1500" b="0">
+                <a:solidFill>
+                  <a:srgbClr val="1A1A1A"/>
+                </a:solidFill>
+                <a:latin typeface="Calibri"/>
               </a:rPr>
               <a:t> and saves nearly </a:t>
             </a:r>
             <a:r>
-              <a:rPr b="1" i="0" sz="1800">
-                <a:solidFill>
-                  <a:srgbClr val="FFD166"/>
-                </a:solidFill>
+              <a:rPr sz="1500" b="1">
+                <a:solidFill>
+                  <a:srgbClr val="075048"/>
+                </a:solidFill>
+                <a:latin typeface="Calibri"/>
               </a:rPr>
               <a:t>200 MB</a:t>
             </a:r>
             <a:r>
-              <a:rPr b="0" i="0" sz="1800">
-                <a:solidFill>
-                  <a:srgbClr val="E0EAF6"/>
-                </a:solidFill>
+              <a:rPr sz="1500" b="0">
+                <a:solidFill>
+                  <a:srgbClr val="1A1A1A"/>
+                </a:solidFill>
+                <a:latin typeface="Calibri"/>
               </a:rPr>
               <a:t> of RAM.</a:t>
-            </a:r>
-          </a:p>
-        </p:txBody>
-      </p:sp>
-      <p:sp>
-        <p:nvSpPr>
-          <p:cNvPr id="8" name="TextBox 7"/>
-          <p:cNvSpPr txBox="1"/>
-          <p:nvPr/>
-        </p:nvSpPr>
-        <p:spPr>
-          <a:xfrm>
-            <a:off x="365760" y="6263640"/>
-            <a:ext cx="6492240" cy="274320"/>
-          </a:xfrm>
-          <a:prstGeom prst="rect">
-            <a:avLst/>
-          </a:prstGeom>
-          <a:noFill/>
-        </p:spPr>
-        <p:txBody>
-          <a:bodyPr wrap="none">
-            <a:spAutoFit/>
-          </a:bodyPr>
-          <a:lstStyle/>
-          <a:p>
-            <a:pPr algn="ctr"/>
-            <a:r>
-              <a:rPr sz="1000" i="1">
-                <a:solidFill>
-                  <a:srgbClr val="ADC8E6"/>
-                </a:solidFill>
-              </a:rPr>
-              <a:t>Table 1–4 – iptables vs. eBPF Performance: Unloaded and Loaded Cluster</a:t>
             </a:r>
           </a:p>
         </p:txBody>
@@ -6332,7 +8330,7 @@
     <p:bg>
       <p:bgPr>
         <a:solidFill>
-          <a:srgbClr val="0D1B2A"/>
+          <a:srgbClr val="FFFFFF"/>
         </a:solidFill>
         <a:effectLst/>
       </p:bgPr>
@@ -6352,14 +8350,14 @@
         </p:nvSpPr>
         <p:spPr>
           <a:xfrm>
-            <a:off x="0" y="73152"/>
-            <a:ext cx="12188952" cy="41148"/>
+            <a:off x="0" y="548640"/>
+            <a:ext cx="12188952" cy="10972"/>
           </a:xfrm>
           <a:prstGeom prst="rect">
             <a:avLst/>
           </a:prstGeom>
           <a:solidFill>
-            <a:srgbClr val="4FC3F7"/>
+            <a:srgbClr val="BBBBBB"/>
           </a:solidFill>
           <a:ln>
             <a:noFill/>
@@ -6395,15 +8393,13 @@
         </p:nvSpPr>
         <p:spPr>
           <a:xfrm>
-            <a:off x="10332720" y="137160"/>
-            <a:ext cx="1828800" cy="365760"/>
-          </a:xfrm>
-          <a:prstGeom prst="rect">
-            <a:avLst/>
-          </a:prstGeom>
-          <a:solidFill>
-            <a:srgbClr val="4FC3F7"/>
-          </a:solidFill>
+            <a:off x="164592" y="54864"/>
+            <a:ext cx="4389120" cy="493776"/>
+          </a:xfrm>
+          <a:prstGeom prst="rect">
+            <a:avLst/>
+          </a:prstGeom>
+          <a:noFill/>
         </p:spPr>
         <p:txBody>
           <a:bodyPr wrap="none">
@@ -6411,14 +8407,49 @@
           </a:bodyPr>
           <a:lstStyle/>
           <a:p>
-            <a:pPr algn="ctr"/>
-            <a:r>
-              <a:rPr sz="1100" b="1">
-                <a:solidFill>
-                  <a:srgbClr val="0D1B2A"/>
-                </a:solidFill>
-              </a:rPr>
-              <a:t>SUMMARY</a:t>
+            <a:pPr algn="l"/>
+            <a:r>
+              <a:rPr sz="1700" b="1">
+                <a:solidFill>
+                  <a:srgbClr val="107C6E"/>
+                </a:solidFill>
+                <a:latin typeface="Calibri"/>
+              </a:rPr>
+              <a:t>IIID</a:t>
+            </a:r>
+            <a:r>
+              <a:rPr sz="750">
+                <a:solidFill>
+                  <a:srgbClr val="505050"/>
+                </a:solidFill>
+                <a:latin typeface="Calibri"/>
+              </a:rPr>
+              <a:t>   INDRAPRASTHA INSTITUTE of</a:t>
+            </a:r>
+          </a:p>
+          <a:p>
+            <a:pPr algn="l">
+              <a:spcBef>
+                <a:spcPts val="0"/>
+              </a:spcBef>
+            </a:pPr>
+            <a:r>
+              <a:rPr sz="750">
+                <a:solidFill>
+                  <a:srgbClr val="505050"/>
+                </a:solidFill>
+                <a:latin typeface="Calibri"/>
+              </a:rPr>
+              <a:t>           INFORMATION TECHNOLOGY </a:t>
+            </a:r>
+            <a:r>
+              <a:rPr sz="750" b="1">
+                <a:solidFill>
+                  <a:srgbClr val="107C6E"/>
+                </a:solidFill>
+                <a:latin typeface="Calibri"/>
+              </a:rPr>
+              <a:t>DELHI</a:t>
             </a:r>
           </a:p>
         </p:txBody>
@@ -6431,8 +8462,8 @@
         </p:nvSpPr>
         <p:spPr>
           <a:xfrm>
-            <a:off x="457200" y="182880"/>
-            <a:ext cx="11274552" cy="822960"/>
+            <a:off x="8412480" y="54864"/>
+            <a:ext cx="3657600" cy="493776"/>
           </a:xfrm>
           <a:prstGeom prst="rect">
             <a:avLst/>
@@ -6440,35 +8471,63 @@
           <a:noFill/>
         </p:spPr>
         <p:txBody>
-          <a:bodyPr wrap="square">
+          <a:bodyPr wrap="none">
             <a:spAutoFit/>
           </a:bodyPr>
           <a:lstStyle/>
           <a:p>
-            <a:pPr algn="l"/>
-            <a:r>
-              <a:rPr b="0" i="0" sz="3000">
-                <a:solidFill>
-                  <a:srgbClr val="FFFFFF"/>
-                </a:solidFill>
-              </a:rPr>
-              <a:t>Aligning </a:t>
-            </a:r>
-            <a:r>
-              <a:rPr b="1" i="0" sz="3000">
-                <a:solidFill>
-                  <a:srgbClr val="FFD166"/>
-                </a:solidFill>
-              </a:rPr>
-              <a:t>CNI Architecture</a:t>
-            </a:r>
-            <a:r>
-              <a:rPr b="0" i="0" sz="3000">
-                <a:solidFill>
-                  <a:srgbClr val="FFFFFF"/>
-                </a:solidFill>
-              </a:rPr>
-              <a:t> to Deployment Needs</a:t>
+            <a:pPr algn="r"/>
+            <a:r>
+              <a:rPr sz="900" b="1">
+                <a:solidFill>
+                  <a:srgbClr val="1A1A1A"/>
+                </a:solidFill>
+                <a:latin typeface="Calibri"/>
+              </a:rPr>
+              <a:t>ECE  |  </a:t>
+            </a:r>
+            <a:r>
+              <a:rPr sz="750">
+                <a:solidFill>
+                  <a:srgbClr val="505050"/>
+                </a:solidFill>
+                <a:latin typeface="Calibri"/>
+              </a:rPr>
+              <a:t>DEPARTMENT OF ELECTRONICS &amp;</a:t>
+            </a:r>
+          </a:p>
+          <a:p>
+            <a:pPr algn="r">
+              <a:spcBef>
+                <a:spcPts val="200"/>
+              </a:spcBef>
+            </a:pPr>
+            <a:r>
+              <a:rPr sz="900" b="1">
+                <a:solidFill>
+                  <a:srgbClr val="107C6E"/>
+                </a:solidFill>
+                <a:latin typeface="Calibri"/>
+              </a:rPr>
+              <a:t>IIID  </a:t>
+            </a:r>
+            <a:r>
+              <a:rPr sz="750">
+                <a:solidFill>
+                  <a:srgbClr val="505050"/>
+                </a:solidFill>
+                <a:latin typeface="Calibri"/>
+              </a:rPr>
+              <a:t>COMMUNICATIONS </a:t>
+            </a:r>
+            <a:r>
+              <a:rPr sz="750" b="1">
+                <a:solidFill>
+                  <a:srgbClr val="107C6E"/>
+                </a:solidFill>
+                <a:latin typeface="Calibri"/>
+              </a:rPr>
+              <a:t>ENGINEERING</a:t>
             </a:r>
           </a:p>
         </p:txBody>
@@ -6480,15 +8539,15 @@
           <p:nvPr/>
         </p:nvSpPr>
         <p:spPr>
-          <a:xfrm>
-            <a:off x="457200" y="1051560"/>
-            <a:ext cx="11274552" cy="7315"/>
+          <a:xfrm rot="18900000">
+            <a:off x="7543800" y="5641848"/>
+            <a:ext cx="5029200" cy="237744"/>
           </a:xfrm>
           <a:prstGeom prst="rect">
             <a:avLst/>
           </a:prstGeom>
           <a:solidFill>
-            <a:srgbClr val="4FC3F7"/>
+            <a:srgbClr val="C4E8E2"/>
           </a:solidFill>
           <a:ln>
             <a:noFill/>
@@ -6518,14 +8577,178 @@
       </p:sp>
       <p:sp>
         <p:nvSpPr>
-          <p:cNvPr id="6" name="TextBox 5"/>
+          <p:cNvPr id="6" name="Rectangle 5"/>
+          <p:cNvSpPr/>
+          <p:nvPr/>
+        </p:nvSpPr>
+        <p:spPr>
+          <a:xfrm rot="18900000">
+            <a:off x="8001000" y="5138928"/>
+            <a:ext cx="5029200" cy="237744"/>
+          </a:xfrm>
+          <a:prstGeom prst="rect">
+            <a:avLst/>
+          </a:prstGeom>
+          <a:solidFill>
+            <a:srgbClr val="C4E8E2"/>
+          </a:solidFill>
+          <a:ln>
+            <a:noFill/>
+          </a:ln>
+        </p:spPr>
+        <p:style>
+          <a:lnRef idx="1">
+            <a:schemeClr val="accent1"/>
+          </a:lnRef>
+          <a:fillRef idx="3">
+            <a:schemeClr val="accent1"/>
+          </a:fillRef>
+          <a:effectRef idx="2">
+            <a:schemeClr val="accent1"/>
+          </a:effectRef>
+          <a:fontRef idx="minor">
+            <a:schemeClr val="lt1"/>
+          </a:fontRef>
+        </p:style>
+        <p:txBody>
+          <a:bodyPr rtlCol="0" anchor="ctr"/>
+          <a:lstStyle/>
+          <a:p>
+            <a:pPr algn="ctr"/>
+          </a:p>
+        </p:txBody>
+      </p:sp>
+      <p:sp>
+        <p:nvSpPr>
+          <p:cNvPr id="7" name="Rectangle 6"/>
+          <p:cNvSpPr/>
+          <p:nvPr/>
+        </p:nvSpPr>
+        <p:spPr>
+          <a:xfrm rot="18900000">
+            <a:off x="8458200" y="4636008"/>
+            <a:ext cx="5029200" cy="237744"/>
+          </a:xfrm>
+          <a:prstGeom prst="rect">
+            <a:avLst/>
+          </a:prstGeom>
+          <a:solidFill>
+            <a:srgbClr val="C4E8E2"/>
+          </a:solidFill>
+          <a:ln>
+            <a:noFill/>
+          </a:ln>
+        </p:spPr>
+        <p:style>
+          <a:lnRef idx="1">
+            <a:schemeClr val="accent1"/>
+          </a:lnRef>
+          <a:fillRef idx="3">
+            <a:schemeClr val="accent1"/>
+          </a:fillRef>
+          <a:effectRef idx="2">
+            <a:schemeClr val="accent1"/>
+          </a:effectRef>
+          <a:fontRef idx="minor">
+            <a:schemeClr val="lt1"/>
+          </a:fontRef>
+        </p:style>
+        <p:txBody>
+          <a:bodyPr rtlCol="0" anchor="ctr"/>
+          <a:lstStyle/>
+          <a:p>
+            <a:pPr algn="ctr"/>
+          </a:p>
+        </p:txBody>
+      </p:sp>
+      <p:sp>
+        <p:nvSpPr>
+          <p:cNvPr id="8" name="Rectangle 7"/>
+          <p:cNvSpPr/>
+          <p:nvPr/>
+        </p:nvSpPr>
+        <p:spPr>
+          <a:xfrm rot="18900000">
+            <a:off x="8915400" y="4133088"/>
+            <a:ext cx="5029200" cy="237744"/>
+          </a:xfrm>
+          <a:prstGeom prst="rect">
+            <a:avLst/>
+          </a:prstGeom>
+          <a:solidFill>
+            <a:srgbClr val="C4E8E2"/>
+          </a:solidFill>
+          <a:ln>
+            <a:noFill/>
+          </a:ln>
+        </p:spPr>
+        <p:style>
+          <a:lnRef idx="1">
+            <a:schemeClr val="accent1"/>
+          </a:lnRef>
+          <a:fillRef idx="3">
+            <a:schemeClr val="accent1"/>
+          </a:fillRef>
+          <a:effectRef idx="2">
+            <a:schemeClr val="accent1"/>
+          </a:effectRef>
+          <a:fontRef idx="minor">
+            <a:schemeClr val="lt1"/>
+          </a:fontRef>
+        </p:style>
+        <p:txBody>
+          <a:bodyPr rtlCol="0" anchor="ctr"/>
+          <a:lstStyle/>
+          <a:p>
+            <a:pPr algn="ctr"/>
+          </a:p>
+        </p:txBody>
+      </p:sp>
+      <p:sp>
+        <p:nvSpPr>
+          <p:cNvPr id="9" name="TextBox 8"/>
           <p:cNvSpPr txBox="1"/>
           <p:nvPr/>
         </p:nvSpPr>
         <p:spPr>
           <a:xfrm>
-            <a:off x="457200" y="1188720"/>
-            <a:ext cx="11274552" cy="5029200"/>
+            <a:off x="11137392" y="6473952"/>
+            <a:ext cx="914400" cy="320040"/>
+          </a:xfrm>
+          <a:prstGeom prst="rect">
+            <a:avLst/>
+          </a:prstGeom>
+          <a:noFill/>
+        </p:spPr>
+        <p:txBody>
+          <a:bodyPr wrap="none">
+            <a:spAutoFit/>
+          </a:bodyPr>
+          <a:lstStyle/>
+          <a:p>
+            <a:pPr algn="r"/>
+            <a:r>
+              <a:rPr sz="1000">
+                <a:solidFill>
+                  <a:srgbClr val="505050"/>
+                </a:solidFill>
+                <a:latin typeface="Calibri"/>
+              </a:rPr>
+              <a:t>8 / 8</a:t>
+            </a:r>
+          </a:p>
+        </p:txBody>
+      </p:sp>
+      <p:sp>
+        <p:nvSpPr>
+          <p:cNvPr id="10" name="TextBox 9"/>
+          <p:cNvSpPr txBox="1"/>
+          <p:nvPr/>
+        </p:nvSpPr>
+        <p:spPr>
+          <a:xfrm>
+            <a:off x="457200" y="685800"/>
+            <a:ext cx="11274552" cy="594360"/>
           </a:xfrm>
           <a:prstGeom prst="rect">
             <a:avLst/>
@@ -6538,83 +8761,179 @@
           </a:bodyPr>
           <a:lstStyle/>
           <a:p>
+            <a:pPr algn="l"/>
+            <a:r>
+              <a:rPr sz="2200" b="1">
+                <a:solidFill>
+                  <a:srgbClr val="107C6E"/>
+                </a:solidFill>
+                <a:latin typeface="Calibri"/>
+              </a:rPr>
+              <a:t>7.  </a:t>
+            </a:r>
+            <a:r>
+              <a:rPr sz="2200" b="1">
+                <a:solidFill>
+                  <a:srgbClr val="107C6E"/>
+                </a:solidFill>
+                <a:latin typeface="Calibri"/>
+              </a:rPr>
+              <a:t>Aligning CNI Architecture to Deployment Needs</a:t>
+            </a:r>
+          </a:p>
+        </p:txBody>
+      </p:sp>
+      <p:sp>
+        <p:nvSpPr>
+          <p:cNvPr id="11" name="Rectangle 10"/>
+          <p:cNvSpPr/>
+          <p:nvPr/>
+        </p:nvSpPr>
+        <p:spPr>
+          <a:xfrm>
+            <a:off x="457200" y="1252728"/>
+            <a:ext cx="11274552" cy="22860"/>
+          </a:xfrm>
+          <a:prstGeom prst="rect">
+            <a:avLst/>
+          </a:prstGeom>
+          <a:solidFill>
+            <a:srgbClr val="107C6E"/>
+          </a:solidFill>
+          <a:ln>
+            <a:noFill/>
+          </a:ln>
+        </p:spPr>
+        <p:style>
+          <a:lnRef idx="1">
+            <a:schemeClr val="accent1"/>
+          </a:lnRef>
+          <a:fillRef idx="3">
+            <a:schemeClr val="accent1"/>
+          </a:fillRef>
+          <a:effectRef idx="2">
+            <a:schemeClr val="accent1"/>
+          </a:effectRef>
+          <a:fontRef idx="minor">
+            <a:schemeClr val="lt1"/>
+          </a:fontRef>
+        </p:style>
+        <p:txBody>
+          <a:bodyPr rtlCol="0" anchor="ctr"/>
+          <a:lstStyle/>
+          <a:p>
+            <a:pPr algn="ctr"/>
+          </a:p>
+        </p:txBody>
+      </p:sp>
+      <p:sp>
+        <p:nvSpPr>
+          <p:cNvPr id="12" name="TextBox 11"/>
+          <p:cNvSpPr txBox="1"/>
+          <p:nvPr/>
+        </p:nvSpPr>
+        <p:spPr>
+          <a:xfrm>
+            <a:off x="457200" y="1325880"/>
+            <a:ext cx="11274552" cy="5166360"/>
+          </a:xfrm>
+          <a:prstGeom prst="rect">
+            <a:avLst/>
+          </a:prstGeom>
+          <a:noFill/>
+        </p:spPr>
+        <p:txBody>
+          <a:bodyPr wrap="square">
+            <a:spAutoFit/>
+          </a:bodyPr>
+          <a:lstStyle/>
+          <a:p>
             <a:pPr algn="l">
               <a:spcBef>
-                <a:spcPts val="600"/>
+                <a:spcPts val="1100"/>
               </a:spcBef>
               <a:spcAft>
                 <a:spcPts val="0"/>
               </a:spcAft>
             </a:pPr>
             <a:r>
-              <a:rPr sz="2000" b="0">
-                <a:solidFill>
-                  <a:srgbClr val="4FC3F7"/>
-                </a:solidFill>
-              </a:rPr>
-              <a:t>▸  </a:t>
-            </a:r>
-            <a:r>
-              <a:rPr b="1" i="0" sz="2200">
-                <a:solidFill>
-                  <a:srgbClr val="FFD166"/>
-                </a:solidFill>
+              <a:rPr sz="1700">
+                <a:solidFill>
+                  <a:srgbClr val="1A1A1A"/>
+                </a:solidFill>
+                <a:latin typeface="Calibri"/>
+              </a:rPr>
+              <a:t>•  </a:t>
+            </a:r>
+            <a:r>
+              <a:rPr sz="1700" b="1">
+                <a:solidFill>
+                  <a:srgbClr val="075048"/>
+                </a:solidFill>
+                <a:latin typeface="Calibri"/>
               </a:rPr>
               <a:t>The Verdict:</a:t>
             </a:r>
             <a:r>
-              <a:rPr b="0" i="0" sz="2200">
-                <a:solidFill>
-                  <a:srgbClr val="E0EAF6"/>
-                </a:solidFill>
+              <a:rPr sz="1700" b="0">
+                <a:solidFill>
+                  <a:srgbClr val="1A1A1A"/>
+                </a:solidFill>
+                <a:latin typeface="Calibri"/>
               </a:rPr>
               <a:t> Use </a:t>
             </a:r>
             <a:r>
-              <a:rPr b="1" i="0" sz="2200">
-                <a:solidFill>
-                  <a:srgbClr val="FFD166"/>
-                </a:solidFill>
+              <a:rPr sz="1700" b="1">
+                <a:solidFill>
+                  <a:srgbClr val="075048"/>
+                </a:solidFill>
+                <a:latin typeface="Calibri"/>
               </a:rPr>
               <a:t>Flannel</a:t>
             </a:r>
             <a:r>
-              <a:rPr b="0" i="0" sz="2200">
-                <a:solidFill>
-                  <a:srgbClr val="E0EAF6"/>
-                </a:solidFill>
+              <a:rPr sz="1700" b="0">
+                <a:solidFill>
+                  <a:srgbClr val="1A1A1A"/>
+                </a:solidFill>
+                <a:latin typeface="Calibri"/>
               </a:rPr>
               <a:t> for edge/latency, tuned </a:t>
             </a:r>
             <a:r>
-              <a:rPr b="1" i="0" sz="2200">
-                <a:solidFill>
-                  <a:srgbClr val="FFD166"/>
-                </a:solidFill>
+              <a:rPr sz="1700" b="1">
+                <a:solidFill>
+                  <a:srgbClr val="075048"/>
+                </a:solidFill>
+                <a:latin typeface="Calibri"/>
               </a:rPr>
               <a:t>Calico</a:t>
             </a:r>
             <a:r>
-              <a:rPr b="0" i="0" sz="2200">
-                <a:solidFill>
-                  <a:srgbClr val="E0EAF6"/>
-                </a:solidFill>
+              <a:rPr sz="1700" b="0">
+                <a:solidFill>
+                  <a:srgbClr val="1A1A1A"/>
+                </a:solidFill>
+                <a:latin typeface="Calibri"/>
               </a:rPr>
               <a:t> for throughput, and </a:t>
             </a:r>
             <a:r>
-              <a:rPr b="1" i="0" sz="2200">
-                <a:solidFill>
-                  <a:srgbClr val="FFD166"/>
-                </a:solidFill>
+              <a:rPr sz="1700" b="1">
+                <a:solidFill>
+                  <a:srgbClr val="075048"/>
+                </a:solidFill>
+                <a:latin typeface="Calibri"/>
               </a:rPr>
               <a:t>Cilium (eBPF)</a:t>
             </a:r>
             <a:r>
-              <a:rPr b="0" i="0" sz="2200">
-                <a:solidFill>
-                  <a:srgbClr val="E0EAF6"/>
-                </a:solidFill>
+              <a:rPr sz="1700" b="0">
+                <a:solidFill>
+                  <a:srgbClr val="1A1A1A"/>
+                </a:solidFill>
+                <a:latin typeface="Calibri"/>
               </a:rPr>
               <a:t> for massive scale.</a:t>
             </a:r>
@@ -6622,49 +8941,54 @@
           <a:p>
             <a:pPr algn="l">
               <a:spcBef>
-                <a:spcPts val="600"/>
+                <a:spcPts val="1100"/>
               </a:spcBef>
               <a:spcAft>
                 <a:spcPts val="0"/>
               </a:spcAft>
             </a:pPr>
             <a:r>
-              <a:rPr sz="2000" b="0">
-                <a:solidFill>
-                  <a:srgbClr val="4FC3F7"/>
-                </a:solidFill>
-              </a:rPr>
-              <a:t>▸  </a:t>
-            </a:r>
-            <a:r>
-              <a:rPr b="1" i="0" sz="2200">
-                <a:solidFill>
-                  <a:srgbClr val="FFD166"/>
-                </a:solidFill>
+              <a:rPr sz="1700">
+                <a:solidFill>
+                  <a:srgbClr val="1A1A1A"/>
+                </a:solidFill>
+                <a:latin typeface="Calibri"/>
+              </a:rPr>
+              <a:t>•  </a:t>
+            </a:r>
+            <a:r>
+              <a:rPr sz="1700" b="1">
+                <a:solidFill>
+                  <a:srgbClr val="075048"/>
+                </a:solidFill>
+                <a:latin typeface="Calibri"/>
               </a:rPr>
               <a:t>Future Work:</a:t>
             </a:r>
             <a:r>
-              <a:rPr b="0" i="0" sz="2200">
-                <a:solidFill>
-                  <a:srgbClr val="E0EAF6"/>
-                </a:solidFill>
+              <a:rPr sz="1700" b="0">
+                <a:solidFill>
+                  <a:srgbClr val="1A1A1A"/>
+                </a:solidFill>
+                <a:latin typeface="Calibri"/>
               </a:rPr>
               <a:t> Investigate hardware offloading via Data Processing Units (</a:t>
             </a:r>
             <a:r>
-              <a:rPr b="1" i="0" sz="2200">
-                <a:solidFill>
-                  <a:srgbClr val="FFD166"/>
-                </a:solidFill>
+              <a:rPr sz="1700" b="1">
+                <a:solidFill>
+                  <a:srgbClr val="075048"/>
+                </a:solidFill>
+                <a:latin typeface="Calibri"/>
               </a:rPr>
               <a:t>DPUs</a:t>
             </a:r>
             <a:r>
-              <a:rPr b="0" i="0" sz="2200">
-                <a:solidFill>
-                  <a:srgbClr val="E0EAF6"/>
-                </a:solidFill>
+              <a:rPr sz="1700" b="0">
+                <a:solidFill>
+                  <a:srgbClr val="1A1A1A"/>
+                </a:solidFill>
+                <a:latin typeface="Calibri"/>
               </a:rPr>
               <a:t>) for 100 Gbit/s networks.</a:t>
             </a:r>
@@ -6672,49 +8996,54 @@
           <a:p>
             <a:pPr algn="l">
               <a:spcBef>
-                <a:spcPts val="600"/>
+                <a:spcPts val="1100"/>
               </a:spcBef>
               <a:spcAft>
                 <a:spcPts val="0"/>
               </a:spcAft>
             </a:pPr>
             <a:r>
-              <a:rPr sz="2000" b="0">
-                <a:solidFill>
-                  <a:srgbClr val="4FC3F7"/>
-                </a:solidFill>
-              </a:rPr>
-              <a:t>▸  </a:t>
-            </a:r>
-            <a:r>
-              <a:rPr b="1" i="0" sz="2200">
-                <a:solidFill>
-                  <a:srgbClr val="FFD166"/>
-                </a:solidFill>
+              <a:rPr sz="1700">
+                <a:solidFill>
+                  <a:srgbClr val="1A1A1A"/>
+                </a:solidFill>
+                <a:latin typeface="Calibri"/>
+              </a:rPr>
+              <a:t>•  </a:t>
+            </a:r>
+            <a:r>
+              <a:rPr sz="1700" b="1">
+                <a:solidFill>
+                  <a:srgbClr val="075048"/>
+                </a:solidFill>
+                <a:latin typeface="Calibri"/>
               </a:rPr>
               <a:t>Future Work:</a:t>
             </a:r>
             <a:r>
-              <a:rPr b="0" i="0" sz="2200">
-                <a:solidFill>
-                  <a:srgbClr val="E0EAF6"/>
-                </a:solidFill>
+              <a:rPr sz="1700" b="0">
+                <a:solidFill>
+                  <a:srgbClr val="1A1A1A"/>
+                </a:solidFill>
+                <a:latin typeface="Calibri"/>
               </a:rPr>
               <a:t> Quantify the 'observability tax' of Deep Packet Inspection (</a:t>
             </a:r>
             <a:r>
-              <a:rPr b="1" i="0" sz="2200">
-                <a:solidFill>
-                  <a:srgbClr val="FFD166"/>
-                </a:solidFill>
+              <a:rPr sz="1700" b="1">
+                <a:solidFill>
+                  <a:srgbClr val="075048"/>
+                </a:solidFill>
+                <a:latin typeface="Calibri"/>
               </a:rPr>
               <a:t>DPI</a:t>
             </a:r>
             <a:r>
-              <a:rPr b="0" i="0" sz="2200">
-                <a:solidFill>
-                  <a:srgbClr val="E0EAF6"/>
-                </a:solidFill>
+              <a:rPr sz="1700" b="0">
+                <a:solidFill>
+                  <a:srgbClr val="1A1A1A"/>
+                </a:solidFill>
+                <a:latin typeface="Calibri"/>
               </a:rPr>
               <a:t>) in eBPF plugins.</a:t>
             </a:r>
